--- a/docs/Entregable 3/Ariel_Presentacion.pptx
+++ b/docs/Entregable 3/Ariel_Presentacion.pptx
@@ -4,6 +4,9 @@
   <p:sldMasterIdLst>
     <p:sldMasterId id="2147483648" r:id="rId1"/>
   </p:sldMasterIdLst>
+  <p:notesMasterIdLst>
+    <p:notesMasterId r:id="rId14"/>
+  </p:notesMasterIdLst>
   <p:sldIdLst>
     <p:sldId id="256" r:id="rId2"/>
     <p:sldId id="257" r:id="rId3"/>
@@ -18,9 +21,6 @@
     <p:sldId id="266" r:id="rId12"/>
     <p:sldId id="267" r:id="rId13"/>
   </p:sldIdLst>
-  <p:notesMasterIdLst>
-    <p:notesMasterId r:id="rId14"/>
-  </p:notesMasterIdLst>
   <p:sldSz cx="12192000" cy="6858000"/>
   <p:notesSz cx="6858000" cy="12192000"/>
   <p:defaultTextStyle>
@@ -115,13 +115,20 @@
       </a:defRPr>
     </a:lvl9pPr>
   </p:defaultTextStyle>
+  <p:extLst>
+    <p:ext uri="{EFAFB233-063F-42B5-8137-9DF3F51BA10A}">
+      <p15:sldGuideLst xmlns:p15="http://schemas.microsoft.com/office/powerpoint/2012/main"/>
+    </p:ext>
+  </p:extLst>
 </p:presentation>
 </file>
 
 <file path=ppt/charts/chart1.xml><?xml version="1.0" encoding="utf-8"?>
-<c:chartSpace xmlns:c="http://schemas.openxmlformats.org/drawingml/2006/chart" xmlns:a="http://schemas.openxmlformats.org/drawingml/2006/main" xmlns:r="http://schemas.openxmlformats.org/officeDocument/2006/relationships">
+<c:chartSpace xmlns:c="http://schemas.openxmlformats.org/drawingml/2006/chart" xmlns:a="http://schemas.openxmlformats.org/drawingml/2006/main" xmlns:r="http://schemas.openxmlformats.org/officeDocument/2006/relationships" xmlns:c16r2="http://schemas.microsoft.com/office/drawing/2015/06/chart">
   <c:date1904 val="0"/>
+  <c:lang val="es-ES"/>
   <c:roundedCorners val="1"/>
+  <c:style val="2"/>
   <c:chart>
     <c:autoTitleDeleted val="1"/>
     <c:plotArea>
@@ -153,18 +160,26 @@
           <c:invertIfNegative val="0"/>
           <c:dLbls>
             <c:numFmt formatCode="0.0" sourceLinked="0"/>
+            <c:spPr>
+              <a:noFill/>
+              <a:ln>
+                <a:noFill/>
+              </a:ln>
+              <a:effectLst/>
+            </c:spPr>
             <c:txPr>
               <a:bodyPr/>
               <a:lstStyle/>
               <a:p>
                 <a:pPr>
-                  <a:defRPr b="0" i="0" strike="noStrike" sz="900" u="none">
+                  <a:defRPr sz="900" b="0" i="0" u="none" strike="noStrike">
                     <a:solidFill>
                       <a:srgbClr val="1E2A32"/>
                     </a:solidFill>
                     <a:latin typeface="Calibri"/>
                   </a:defRPr>
                 </a:pPr>
+                <a:endParaRPr lang="es-CR"/>
               </a:p>
             </c:txPr>
             <c:showLegendKey val="0"/>
@@ -174,31 +189,34 @@
             <c:showPercent val="0"/>
             <c:showBubbleSize val="0"/>
             <c:showLeaderLines val="0"/>
+            <c:extLst>
+              <c:ext xmlns:c15="http://schemas.microsoft.com/office/drawing/2012/chart" uri="{CE6537A1-D6FC-4f65-9D91-7224C49458BB}">
+                <c15:showLeaderLines val="0"/>
+              </c:ext>
+            </c:extLst>
           </c:dLbls>
           <c:cat>
-            <c:multiLvlStrRef>
+            <c:strRef>
               <c:f>Sheet1!$A$2:$A$6</c:f>
-              <c:multiLvlStrCache>
+              <c:strCache>
                 <c:ptCount val="5"/>
-                <c:lvl>
-                  <c:pt idx="0">
-                    <c:v>Antropom.</c:v>
-                  </c:pt>
-                  <c:pt idx="1">
-                    <c:v>Animacidad</c:v>
-                  </c:pt>
-                  <c:pt idx="2">
-                    <c:v>Simpatía</c:v>
-                  </c:pt>
-                  <c:pt idx="3">
-                    <c:v>Intel. perc.</c:v>
-                  </c:pt>
-                  <c:pt idx="4">
-                    <c:v>Seg. perc.</c:v>
-                  </c:pt>
-                </c:lvl>
-              </c:multiLvlStrCache>
-            </c:multiLvlStrRef>
+                <c:pt idx="0">
+                  <c:v>Antropom.</c:v>
+                </c:pt>
+                <c:pt idx="1">
+                  <c:v>Animacidad</c:v>
+                </c:pt>
+                <c:pt idx="2">
+                  <c:v>Simpatía</c:v>
+                </c:pt>
+                <c:pt idx="3">
+                  <c:v>Intel. perc.</c:v>
+                </c:pt>
+                <c:pt idx="4">
+                  <c:v>Seg. perc.</c:v>
+                </c:pt>
+              </c:strCache>
+            </c:strRef>
           </c:cat>
           <c:val>
             <c:numRef>
@@ -224,6 +242,11 @@
               </c:numCache>
             </c:numRef>
           </c:val>
+          <c:extLst>
+            <c:ext xmlns:c16="http://schemas.microsoft.com/office/drawing/2014/chart" uri="{C3380CC4-5D6E-409C-BE32-E72D297353CC}">
+              <c16:uniqueId val="{00000000-02AE-435E-97B1-4B1B91EDD089}"/>
+            </c:ext>
+          </c:extLst>
         </c:ser>
         <c:ser>
           <c:idx val="1"/>
@@ -248,18 +271,26 @@
           <c:invertIfNegative val="0"/>
           <c:dLbls>
             <c:numFmt formatCode="0.0" sourceLinked="0"/>
+            <c:spPr>
+              <a:noFill/>
+              <a:ln>
+                <a:noFill/>
+              </a:ln>
+              <a:effectLst/>
+            </c:spPr>
             <c:txPr>
               <a:bodyPr/>
               <a:lstStyle/>
               <a:p>
                 <a:pPr>
-                  <a:defRPr b="0" i="0" strike="noStrike" sz="900" u="none">
+                  <a:defRPr sz="900" b="0" i="0" u="none" strike="noStrike">
                     <a:solidFill>
                       <a:srgbClr val="1E2A32"/>
                     </a:solidFill>
                     <a:latin typeface="Calibri"/>
                   </a:defRPr>
                 </a:pPr>
+                <a:endParaRPr lang="es-CR"/>
               </a:p>
             </c:txPr>
             <c:showLegendKey val="0"/>
@@ -269,31 +300,34 @@
             <c:showPercent val="0"/>
             <c:showBubbleSize val="0"/>
             <c:showLeaderLines val="0"/>
+            <c:extLst>
+              <c:ext xmlns:c15="http://schemas.microsoft.com/office/drawing/2012/chart" uri="{CE6537A1-D6FC-4f65-9D91-7224C49458BB}">
+                <c15:showLeaderLines val="0"/>
+              </c:ext>
+            </c:extLst>
           </c:dLbls>
           <c:cat>
-            <c:multiLvlStrRef>
+            <c:strRef>
               <c:f>Sheet1!$A$2:$A$6</c:f>
-              <c:multiLvlStrCache>
+              <c:strCache>
                 <c:ptCount val="5"/>
-                <c:lvl>
-                  <c:pt idx="0">
-                    <c:v>Antropom.</c:v>
-                  </c:pt>
-                  <c:pt idx="1">
-                    <c:v>Animacidad</c:v>
-                  </c:pt>
-                  <c:pt idx="2">
-                    <c:v>Simpatía</c:v>
-                  </c:pt>
-                  <c:pt idx="3">
-                    <c:v>Intel. perc.</c:v>
-                  </c:pt>
-                  <c:pt idx="4">
-                    <c:v>Seg. perc.</c:v>
-                  </c:pt>
-                </c:lvl>
-              </c:multiLvlStrCache>
-            </c:multiLvlStrRef>
+                <c:pt idx="0">
+                  <c:v>Antropom.</c:v>
+                </c:pt>
+                <c:pt idx="1">
+                  <c:v>Animacidad</c:v>
+                </c:pt>
+                <c:pt idx="2">
+                  <c:v>Simpatía</c:v>
+                </c:pt>
+                <c:pt idx="3">
+                  <c:v>Intel. perc.</c:v>
+                </c:pt>
+                <c:pt idx="4">
+                  <c:v>Seg. perc.</c:v>
+                </c:pt>
+              </c:strCache>
+            </c:strRef>
           </c:cat>
           <c:val>
             <c:numRef>
@@ -319,36 +353,23 @@
               </c:numCache>
             </c:numRef>
           </c:val>
+          <c:extLst>
+            <c:ext xmlns:c16="http://schemas.microsoft.com/office/drawing/2014/chart" uri="{C3380CC4-5D6E-409C-BE32-E72D297353CC}">
+              <c16:uniqueId val="{00000001-02AE-435E-97B1-4B1B91EDD089}"/>
+            </c:ext>
+          </c:extLst>
         </c:ser>
         <c:dLbls>
-          <c:numFmt formatCode="0.0" sourceLinked="0"/>
-          <c:txPr>
-            <a:bodyPr/>
-            <a:lstStyle/>
-            <a:p>
-              <a:pPr>
-                <a:defRPr b="0" i="0" strike="noStrike" sz="900" u="none">
-                  <a:solidFill>
-                    <a:srgbClr val="1E2A32"/>
-                  </a:solidFill>
-                  <a:latin typeface="Calibri"/>
-                </a:defRPr>
-              </a:pPr>
-            </a:p>
-          </c:txPr>
           <c:showLegendKey val="0"/>
           <c:showVal val="1"/>
           <c:showCatName val="0"/>
           <c:showSerName val="0"/>
           <c:showPercent val="0"/>
           <c:showBubbleSize val="0"/>
-          <c:showLeaderLines val="0"/>
         </c:dLbls>
         <c:gapWidth val="150"/>
-        <c:overlap val="0"/>
         <c:axId val="2094734554"/>
         <c:axId val="2094734552"/>
-        <c:axId val="2094734556"/>
       </c:barChart>
       <c:catAx>
         <c:axId val="2094734554"/>
@@ -389,6 +410,7 @@
         <c:crosses val="autoZero"/>
         <c:auto val="1"/>
         <c:lblAlgn val="ctr"/>
+        <c:lblOffset val="100"/>
         <c:noMultiLvlLbl val="1"/>
       </c:catAx>
       <c:valAx>
@@ -471,6 +493,7 @@
     </c:legend>
     <c:plotVisOnly val="1"/>
     <c:dispBlanksAs val="span"/>
+    <c:showDLblsOverMax val="1"/>
   </c:chart>
   <c:spPr>
     <a:solidFill>
@@ -509,234 +532,10 @@
           <a:chExt cx="0" cy="0"/>
         </a:xfrm>
       </p:grpSpPr>
-      <p:sp>
-        <p:nvSpPr>
-          <p:cNvPr id="2" name="Header Placeholder 1"/>
-          <p:cNvSpPr>
-            <a:spLocks noGrp="1"/>
-          </p:cNvSpPr>
-          <p:nvPr>
-            <p:ph type="hdr" sz="quarter"/>
-          </p:nvPr>
-        </p:nvSpPr>
-        <p:spPr>
-          <a:xfrm>
-            <a:off x="0" y="0"/>
-            <a:ext cx="2971800" cy="458788"/>
-          </a:xfrm>
-          <a:prstGeom prst="rect">
-            <a:avLst/>
-          </a:prstGeom>
-        </p:spPr>
-        <p:txBody>
-          <a:bodyPr vert="horz" lIns="91440" tIns="45720" rIns="91440" bIns="45720" rtlCol="0"/>
-          <a:lstStyle>
-            <a:lvl1pPr algn="l">
-              <a:defRPr sz="1200"/>
-            </a:lvl1pPr>
-          </a:lstStyle>
-          <a:p>
-            <a:endParaRPr lang="en-US"/>
-          </a:p>
-        </p:txBody>
-      </p:sp>
-      <p:sp>
-        <p:nvSpPr>
-          <p:cNvPr id="3" name="Date Placeholder 2"/>
-          <p:cNvSpPr>
-            <a:spLocks noGrp="1"/>
-          </p:cNvSpPr>
-          <p:nvPr>
-            <p:ph type="dt" idx="1"/>
-          </p:nvPr>
-        </p:nvSpPr>
-        <p:spPr>
-          <a:xfrm>
-            <a:off x="3884613" y="0"/>
-            <a:ext cx="2971800" cy="458788"/>
-          </a:xfrm>
-          <a:prstGeom prst="rect">
-            <a:avLst/>
-          </a:prstGeom>
-        </p:spPr>
-        <p:txBody>
-          <a:bodyPr vert="horz" lIns="91440" tIns="45720" rIns="91440" bIns="45720" rtlCol="0"/>
-          <a:lstStyle>
-            <a:lvl1pPr algn="r">
-              <a:defRPr sz="1200"/>
-            </a:lvl1pPr>
-          </a:lstStyle>
-          <a:p>
-            <a:fld id="{5282F153-3F37-0F45-9E97-73ACFA13230C}" type="datetimeFigureOut">
-              <a:rPr lang="en-US"/>
-              <a:t>7/23/19</a:t>
-            </a:fld>
-            <a:endParaRPr lang="en-US"/>
-          </a:p>
-        </p:txBody>
-      </p:sp>
-      <p:sp>
-        <p:nvSpPr>
-          <p:cNvPr id="4" name="Slide Image Placeholder 3"/>
-          <p:cNvSpPr>
-            <a:spLocks noGrp="1" noRot="1" noChangeAspect="1"/>
-          </p:cNvSpPr>
-          <p:nvPr>
-            <p:ph type="sldImg" idx="2"/>
-          </p:nvPr>
-        </p:nvSpPr>
-        <p:spPr>
-          <a:xfrm>
-            <a:off x="685800" y="1143000"/>
-            <a:ext cx="5486400" cy="3086100"/>
-          </a:xfrm>
-          <a:prstGeom prst="rect">
-            <a:avLst/>
-          </a:prstGeom>
-          <a:noFill/>
-          <a:ln w="12700">
-            <a:solidFill>
-              <a:prstClr val="black"/>
-            </a:solidFill>
-          </a:ln>
-        </p:spPr>
-        <p:txBody>
-          <a:bodyPr vert="horz" lIns="91440" tIns="45720" rIns="91440" bIns="45720" rtlCol="0" anchor="ctr"/>
-          <a:lstStyle/>
-          <a:p>
-            <a:endParaRPr lang="en-US"/>
-          </a:p>
-        </p:txBody>
-      </p:sp>
-      <p:sp>
-        <p:nvSpPr>
-          <p:cNvPr id="5" name="Notes Placeholder 4"/>
-          <p:cNvSpPr>
-            <a:spLocks noGrp="1"/>
-          </p:cNvSpPr>
-          <p:nvPr>
-            <p:ph type="body" sz="quarter" idx="3"/>
-          </p:nvPr>
-        </p:nvSpPr>
-        <p:spPr>
-          <a:xfrm>
-            <a:off x="685800" y="4400550"/>
-            <a:ext cx="5486400" cy="3600450"/>
-          </a:xfrm>
-          <a:prstGeom prst="rect">
-            <a:avLst/>
-          </a:prstGeom>
-        </p:spPr>
-        <p:txBody>
-          <a:bodyPr vert="horz" lIns="91440" tIns="45720" rIns="91440" bIns="45720" rtlCol="0"/>
-          <a:lstStyle/>
-          <a:p>
-            <a:pPr lvl="0"/>
-            <a:r>
-              <a:rPr lang="en-US"/>
-              <a:t>Click to edit Master text styles</a:t>
-            </a:r>
-          </a:p>
-          <a:p>
-            <a:pPr lvl="1"/>
-            <a:r>
-              <a:rPr lang="en-US"/>
-              <a:t>Second level</a:t>
-            </a:r>
-          </a:p>
-          <a:p>
-            <a:pPr lvl="2"/>
-            <a:r>
-              <a:rPr lang="en-US"/>
-              <a:t>Third level</a:t>
-            </a:r>
-          </a:p>
-          <a:p>
-            <a:pPr lvl="3"/>
-            <a:r>
-              <a:rPr lang="en-US"/>
-              <a:t>Fourth level</a:t>
-            </a:r>
-          </a:p>
-          <a:p>
-            <a:pPr lvl="4"/>
-            <a:r>
-              <a:rPr lang="en-US"/>
-              <a:t>Fifth level</a:t>
-            </a:r>
-          </a:p>
-        </p:txBody>
-      </p:sp>
-      <p:sp>
-        <p:nvSpPr>
-          <p:cNvPr id="6" name="Footer Placeholder 5"/>
-          <p:cNvSpPr>
-            <a:spLocks noGrp="1"/>
-          </p:cNvSpPr>
-          <p:nvPr>
-            <p:ph type="ftr" sz="quarter" idx="4"/>
-          </p:nvPr>
-        </p:nvSpPr>
-        <p:spPr>
-          <a:xfrm>
-            <a:off x="0" y="8685213"/>
-            <a:ext cx="2971800" cy="458787"/>
-          </a:xfrm>
-          <a:prstGeom prst="rect">
-            <a:avLst/>
-          </a:prstGeom>
-        </p:spPr>
-        <p:txBody>
-          <a:bodyPr vert="horz" lIns="91440" tIns="45720" rIns="91440" bIns="45720" rtlCol="0" anchor="b"/>
-          <a:lstStyle>
-            <a:lvl1pPr algn="l">
-              <a:defRPr sz="1200"/>
-            </a:lvl1pPr>
-          </a:lstStyle>
-          <a:p>
-            <a:endParaRPr lang="en-US"/>
-          </a:p>
-        </p:txBody>
-      </p:sp>
-      <p:sp>
-        <p:nvSpPr>
-          <p:cNvPr id="7" name="Slide Number Placeholder 6"/>
-          <p:cNvSpPr>
-            <a:spLocks noGrp="1"/>
-          </p:cNvSpPr>
-          <p:nvPr>
-            <p:ph type="sldNum" sz="quarter" idx="5"/>
-          </p:nvPr>
-        </p:nvSpPr>
-        <p:spPr>
-          <a:xfrm>
-            <a:off x="3884613" y="8685213"/>
-            <a:ext cx="2971800" cy="458787"/>
-          </a:xfrm>
-          <a:prstGeom prst="rect">
-            <a:avLst/>
-          </a:prstGeom>
-        </p:spPr>
-        <p:txBody>
-          <a:bodyPr vert="horz" lIns="91440" tIns="45720" rIns="91440" bIns="45720" rtlCol="0" anchor="b"/>
-          <a:lstStyle>
-            <a:lvl1pPr algn="r">
-              <a:defRPr sz="1200"/>
-            </a:lvl1pPr>
-          </a:lstStyle>
-          <a:p>
-            <a:fld id="{CE5E9CC1-C706-0F49-92D6-E571CC5EEA8F}" type="slidenum">
-              <a:rPr lang="en-US"/>
-              <a:t>‹#›</a:t>
-            </a:fld>
-            <a:endParaRPr lang="en-US"/>
-          </a:p>
-        </p:txBody>
-      </p:sp>
     </p:spTree>
     <p:extLst>
       <p:ext uri="{BB962C8B-B14F-4D97-AF65-F5344CB8AC3E}">
-        <p14:creationId xmlns:p14="http://schemas.microsoft.com/office/powerpoint/2010/main" val="1024086991"/>
+        <p14:creationId xmlns:p14="http://schemas.microsoft.com/office/powerpoint/2010/main" val="659128410"/>
       </p:ext>
     </p:extLst>
   </p:cSld>
@@ -884,7 +683,6 @@
               <a:rPr lang="en-US" dirty="0"/>
               <a:t>(~30 s) Buenas. Presento Ariel, un agente virtual corporizado para consulta de documentos sobre RAG. La pregunta que guía el trabajo es directa: cuando ponemos un cuerpo y una voz frente a un sistema RAG, ¿realmente mejora la experiencia, o no? Hoy muestro el sistema, el estudio con expertos y lo que encontramos.</a:t>
             </a:r>
-            <a:endParaRPr lang="en-US" dirty="0"/>
           </a:p>
         </p:txBody>
       </p:sp>
@@ -972,7 +770,6 @@
               <a:rPr lang="en-US" dirty="0"/>
               <a:t>(~45 s) Las citas confirman la interpretación. Todos los participantes del agente señalaron la voz artificial y el movimiento rígido; varios pidieron un avatar más realista. En la condición de texto, la confianza venía de poder verificar el artículo en el PDF. El dato cualitativo apunta al mismo lugar que el cuantitativo —la fidelidad— y a que la fuente visible es el ancla de la confianza.</a:t>
             </a:r>
-            <a:endParaRPr lang="en-US" dirty="0"/>
           </a:p>
         </p:txBody>
       </p:sp>
@@ -1060,7 +857,6 @@
               <a:rPr lang="en-US" dirty="0"/>
               <a:t>(~55 s) La conclusión cabe en una frase: el cuello de botella es la fidelidad multimodal, no el cuerpo. El mismo avatar que dio autoridad restó naturalidad porque su voz y movimiento eran sintéticos. Recomendación de diseño: mantener siempre visible la fuente. Por transparencia: por ahora no proyecto someterlo al Comité de Ética ni publicarlo; es un ejercicio del curso, aunque con más fidelidad el siguiente paso sería un estudio con usuarios reales.</a:t>
             </a:r>
-            <a:endParaRPr lang="en-US" dirty="0"/>
           </a:p>
         </p:txBody>
       </p:sp>
@@ -1148,7 +944,6 @@
               <a:rPr lang="en-US" dirty="0"/>
               <a:t>(~20 s) En síntesis: el embodiment no es bueno o malo por sí mismo; depende de la fidelidad con que se ejecuta. Con gusto respondo preguntas sobre diseño, instrumentos, limitaciones o siguientes pasos. Gracias.</a:t>
             </a:r>
-            <a:endParaRPr lang="en-US" dirty="0"/>
           </a:p>
         </p:txBody>
       </p:sp>
@@ -1236,7 +1031,6 @@
               <a:rPr lang="en-US" dirty="0"/>
               <a:t>(~50 s) El RAG ya resuelve la parte difícil: recupera del documento y responde con fundamento. El problema es de interfaz: casi todo se entrega como texto. La pregunta de diseño es si añadir cuerpo y voz mejora la percepción, o solo agrega ruido. No es obvio que ayude, porque aquí lo que importa es que el dato sea correcto.</a:t>
             </a:r>
-            <a:endParaRPr lang="en-US" dirty="0"/>
           </a:p>
         </p:txBody>
       </p:sp>
@@ -1324,7 +1118,6 @@
               <a:rPr lang="en-US" dirty="0"/>
               <a:t>(~40 s) Tres preguntas, todas comparando la condición con agente corporizado contra una interfaz solo de texto: confianza; naturalidad y comprensión; usabilidad y retención. La clave del diseño: el motor RAG y el LLM son idénticos en ambas condiciones, así que cualquier diferencia se atribuye al cuerpo y la voz.</a:t>
             </a:r>
-            <a:endParaRPr lang="en-US" dirty="0"/>
           </a:p>
         </p:txBody>
       </p:sp>
@@ -1412,7 +1205,6 @@
               <a:rPr lang="en-US" dirty="0"/>
               <a:t>(~55 s) Ariel corre 100% en el navegador: avatar VRM con Three.js, sin Unity. El back end es un RAG en Node/Express, desplegado como Firebase Cloud Functions, con GPT-4.1-nano. La voz usa la Web Speech API. Lo importante para el estudio es el toggle: con un clic paso de la condición con agente a la de solo texto, manteniendo el mismo motor. A la derecha, el sistema real.</a:t>
             </a:r>
-            <a:endParaRPr lang="en-US" dirty="0"/>
           </a:p>
         </p:txBody>
       </p:sp>
@@ -1500,7 +1292,6 @@
               <a:rPr lang="en-US" dirty="0"/>
               <a:t>(~60 s, o demo en vivo) Aquí hago la demostración. Muestro dos corridas: primero la condición con agente, donde pregunto por voz y Ariel responde hablando; luego la de texto con la misma consulta. Si la demo en vivo falla, reproduzco el video pregrabado enlazado en el README. El contenido de la respuesta es el mismo: lo único que cambia es la presentación.</a:t>
             </a:r>
-            <a:endParaRPr lang="en-US" dirty="0"/>
           </a:p>
         </p:txBody>
       </p:sp>
@@ -1588,7 +1379,6 @@
               <a:rPr lang="en-US" dirty="0"/>
               <a:t>(~60 s) Piloto con expertos, entre-sujetos: cada persona ve solo una condición, para evitar el sesgo de comparación directa. Ocho participantes, cuatro por condición; excluí a TXT-01 porque no completó todos los formularios. El expediente son tres reglamentos reales de la UCR con datos verificables para medir retención objetiva. Tres tareas, cuatro instrumentos estándar. Al ser piloto, el análisis es descriptivo: tendencias, no significancia.</a:t>
             </a:r>
-            <a:endParaRPr lang="en-US" dirty="0"/>
           </a:p>
         </p:txBody>
       </p:sp>
@@ -1676,7 +1466,6 @@
               <a:rPr lang="en-US" dirty="0"/>
               <a:t>(~50 s) Tres números resumen todo. Confianza: el agente sube, 4.83 contra 3.58. Naturalidad por antropomorfismo: el agente BAJA, 1.60 contra 2.50; el texto se percibió MÁS natural que el avatar. Usabilidad: empate, ambos sobre el umbral aceptable de 68. La retención también equivalente y alta. El cuerpo ayudó en una cosa, perjudicó en otra y no movió la tercera.</a:t>
             </a:r>
-            <a:endParaRPr lang="en-US" dirty="0"/>
           </a:p>
         </p:txBody>
       </p:sp>
@@ -1764,7 +1553,6 @@
               <a:rPr lang="en-US" dirty="0"/>
               <a:t>(~55 s) Este es el corazón del trabajo. La barra oscura es el agente; la clara, el texto. En cuatro de cinco subescalas el agente queda por debajo. La única que se iguala es inteligencia percibida, y tiene sentido: eso lo determina el RAG, que es el mismo. ¿Por qué baja la naturalidad? Por la fidelidad: voz del navegador, lip-sync simulado y avatar tipo manga generan señales de artificialidad. Valle Inquietante en acción.</a:t>
             </a:r>
-            <a:endParaRPr lang="en-US" dirty="0"/>
           </a:p>
         </p:txBody>
       </p:sp>
@@ -1852,7 +1640,6 @@
               <a:rPr lang="en-US" dirty="0"/>
               <a:t>(~55 s) Por pregunta. RQ1: el agente sube la confianza, pero en ambas condiciones lo que más confianza generó fue ver el artículo citado en el PDF. RQ2: el agente baja la naturalidad, por fidelidad, no por tener cuerpo. RQ3: empate en usabilidad y retención; el cuerpo no estorba, pero tampoco ayuda a comprender más, probablemente porque la tarea es corta y el PDF siempre está visible.</a:t>
             </a:r>
-            <a:endParaRPr lang="en-US" dirty="0"/>
           </a:p>
         </p:txBody>
       </p:sp>
@@ -1925,6 +1712,11 @@
 <file path=ppt/slideMasters/slideMaster1.xml><?xml version="1.0" encoding="utf-8"?>
 <p:sldMaster xmlns:a="http://schemas.openxmlformats.org/drawingml/2006/main" xmlns:r="http://schemas.openxmlformats.org/officeDocument/2006/relationships" xmlns:p="http://schemas.openxmlformats.org/presentationml/2006/main">
   <p:cSld>
+    <p:bg>
+      <p:bgRef idx="1001">
+        <a:schemeClr val="bg1"/>
+      </p:bgRef>
+    </p:bg>
     <p:spTree>
       <p:nvGrpSpPr>
         <p:cNvPr id="1" name=""/>
@@ -2207,6 +1999,7 @@
         <a:solidFill>
           <a:srgbClr val="0E2A38"/>
         </a:solidFill>
+        <a:effectLst/>
       </p:bgPr>
     </p:bg>
     <p:spTree>
@@ -2244,6 +2037,13 @@
           </a:solidFill>
           <a:ln/>
         </p:spPr>
+        <p:txBody>
+          <a:bodyPr/>
+          <a:lstStyle/>
+          <a:p>
+            <a:endParaRPr lang="es-CR"/>
+          </a:p>
+        </p:txBody>
       </p:sp>
       <p:sp>
         <p:nvSpPr>
@@ -2266,6 +2066,13 @@
           </a:solidFill>
           <a:ln/>
         </p:spPr>
+        <p:txBody>
+          <a:bodyPr/>
+          <a:lstStyle/>
+          <a:p>
+            <a:endParaRPr lang="es-CR"/>
+          </a:p>
+        </p:txBody>
       </p:sp>
       <p:sp>
         <p:nvSpPr>
@@ -2288,11 +2095,11 @@
           <a:bodyPr wrap="square" lIns="0" tIns="0" rIns="0" bIns="0" rtlCol="0" anchor="ctr"/>
           <a:lstStyle/>
           <a:p>
-            <a:pPr indent="0" marL="0">
-              <a:buNone/>
-            </a:pPr>
-            <a:r>
-              <a:rPr lang="en-US" sz="1400" b="1" spc="300" kern="0" dirty="0">
+            <a:pPr marL="0" indent="0">
+              <a:buNone/>
+            </a:pPr>
+            <a:r>
+              <a:rPr lang="en-US" sz="1400" b="1" kern="0" spc="300" dirty="0">
                 <a:solidFill>
                   <a:srgbClr val="1FB6A6"/>
                 </a:solidFill>
@@ -2327,7 +2134,7 @@
           <a:bodyPr wrap="square" lIns="0" tIns="0" rIns="0" bIns="0" rtlCol="0" anchor="ctr"/>
           <a:lstStyle/>
           <a:p>
-            <a:pPr indent="0" marL="0">
+            <a:pPr marL="0" indent="0">
               <a:buNone/>
             </a:pPr>
             <a:r>
@@ -2366,7 +2173,7 @@
           <a:bodyPr wrap="square" lIns="0" tIns="0" rIns="0" bIns="0" rtlCol="0" anchor="ctr"/>
           <a:lstStyle/>
           <a:p>
-            <a:pPr indent="0" marL="0">
+            <a:pPr marL="0" indent="0">
               <a:buNone/>
             </a:pPr>
             <a:r>
@@ -2405,7 +2212,7 @@
           <a:bodyPr wrap="square" lIns="0" tIns="0" rIns="0" bIns="0" rtlCol="0" anchor="ctr"/>
           <a:lstStyle/>
           <a:p>
-            <a:pPr indent="0" marL="0">
+            <a:pPr marL="0" indent="0">
               <a:buNone/>
             </a:pPr>
             <a:r>
@@ -2422,7 +2229,7 @@
             <a:endParaRPr lang="en-US" sz="1600" dirty="0"/>
           </a:p>
           <a:p>
-            <a:pPr indent="0" marL="0">
+            <a:pPr marL="0" indent="0">
               <a:buNone/>
             </a:pPr>
             <a:r>
@@ -2461,7 +2268,7 @@
           <a:bodyPr wrap="square" lIns="0" tIns="0" rIns="0" bIns="0" rtlCol="0" anchor="ctr"/>
           <a:lstStyle/>
           <a:p>
-            <a:pPr indent="0" marL="0">
+            <a:pPr marL="0" indent="0">
               <a:buNone/>
             </a:pPr>
             <a:r>
@@ -2495,6 +2302,7 @@
         <a:solidFill>
           <a:srgbClr val="FFFFFF"/>
         </a:solidFill>
+        <a:effectLst/>
       </p:bgPr>
     </p:bg>
     <p:spTree>
@@ -2532,11 +2340,11 @@
           <a:bodyPr wrap="square" lIns="0" tIns="0" rIns="0" bIns="0" rtlCol="0" anchor="ctr"/>
           <a:lstStyle/>
           <a:p>
-            <a:pPr indent="0" marL="0">
-              <a:buNone/>
-            </a:pPr>
-            <a:r>
-              <a:rPr lang="en-US" sz="1200" b="1" spc="200" kern="0" dirty="0">
+            <a:pPr marL="0" indent="0">
+              <a:buNone/>
+            </a:pPr>
+            <a:r>
+              <a:rPr lang="en-US" sz="1200" b="1" kern="0" spc="200" dirty="0">
                 <a:solidFill>
                   <a:srgbClr val="0E7C86"/>
                 </a:solidFill>
@@ -2571,7 +2379,7 @@
           <a:bodyPr wrap="square" lIns="0" tIns="0" rIns="0" bIns="0" rtlCol="0" anchor="ctr"/>
           <a:lstStyle/>
           <a:p>
-            <a:pPr indent="0" marL="0">
+            <a:pPr marL="0" indent="0">
               <a:buNone/>
             </a:pPr>
             <a:r>
@@ -2610,13 +2418,20 @@
           </a:solidFill>
           <a:ln/>
           <a:effectLst>
-            <a:outerShdw sx="100000" sy="100000" kx="0" ky="0" algn="bl" rotWithShape="0" blurRad="88900" dist="38100" dir="5400000">
+            <a:outerShdw blurRad="88900" dist="38100" dir="5400000" algn="bl" rotWithShape="0">
               <a:srgbClr val="000000">
                 <a:alpha val="13000"/>
               </a:srgbClr>
             </a:outerShdw>
           </a:effectLst>
         </p:spPr>
+        <p:txBody>
+          <a:bodyPr/>
+          <a:lstStyle/>
+          <a:p>
+            <a:endParaRPr lang="es-CR"/>
+          </a:p>
+        </p:txBody>
       </p:sp>
       <p:sp>
         <p:nvSpPr>
@@ -2639,7 +2454,7 @@
           <a:bodyPr wrap="square" lIns="0" tIns="0" rIns="0" bIns="0" rtlCol="0" anchor="ctr"/>
           <a:lstStyle/>
           <a:p>
-            <a:pPr indent="0" marL="0">
+            <a:pPr marL="0" indent="0">
               <a:buNone/>
             </a:pPr>
             <a:r>
@@ -2678,7 +2493,7 @@
           <a:bodyPr wrap="square" lIns="0" tIns="0" rIns="0" bIns="0" rtlCol="0" anchor="ctr"/>
           <a:lstStyle/>
           <a:p>
-            <a:pPr indent="0" marL="0">
+            <a:pPr marL="0" indent="0">
               <a:buNone/>
             </a:pPr>
             <a:r>
@@ -2717,7 +2532,7 @@
           <a:bodyPr wrap="square" lIns="0" tIns="0" rIns="0" bIns="0" rtlCol="0" anchor="ctr"/>
           <a:lstStyle/>
           <a:p>
-            <a:pPr algn="r" indent="0" marL="0">
+            <a:pPr marL="0" indent="0" algn="r">
               <a:buNone/>
             </a:pPr>
             <a:r>
@@ -2756,13 +2571,20 @@
           </a:solidFill>
           <a:ln/>
           <a:effectLst>
-            <a:outerShdw sx="100000" sy="100000" kx="0" ky="0" algn="bl" rotWithShape="0" blurRad="88900" dist="38100" dir="5400000">
+            <a:outerShdw blurRad="88900" dist="38100" dir="5400000" algn="bl" rotWithShape="0">
               <a:srgbClr val="000000">
                 <a:alpha val="13000"/>
               </a:srgbClr>
             </a:outerShdw>
           </a:effectLst>
         </p:spPr>
+        <p:txBody>
+          <a:bodyPr/>
+          <a:lstStyle/>
+          <a:p>
+            <a:endParaRPr lang="es-CR"/>
+          </a:p>
+        </p:txBody>
       </p:sp>
       <p:sp>
         <p:nvSpPr>
@@ -2785,7 +2607,7 @@
           <a:bodyPr wrap="square" lIns="0" tIns="0" rIns="0" bIns="0" rtlCol="0" anchor="ctr"/>
           <a:lstStyle/>
           <a:p>
-            <a:pPr indent="0" marL="0">
+            <a:pPr marL="0" indent="0">
               <a:buNone/>
             </a:pPr>
             <a:r>
@@ -2824,7 +2646,7 @@
           <a:bodyPr wrap="square" lIns="0" tIns="0" rIns="0" bIns="0" rtlCol="0" anchor="ctr"/>
           <a:lstStyle/>
           <a:p>
-            <a:pPr indent="0" marL="0">
+            <a:pPr marL="0" indent="0">
               <a:buNone/>
             </a:pPr>
             <a:r>
@@ -2863,7 +2685,7 @@
           <a:bodyPr wrap="square" lIns="0" tIns="0" rIns="0" bIns="0" rtlCol="0" anchor="ctr"/>
           <a:lstStyle/>
           <a:p>
-            <a:pPr algn="r" indent="0" marL="0">
+            <a:pPr marL="0" indent="0" algn="r">
               <a:buNone/>
             </a:pPr>
             <a:r>
@@ -2902,13 +2724,20 @@
           </a:solidFill>
           <a:ln/>
           <a:effectLst>
-            <a:outerShdw sx="100000" sy="100000" kx="0" ky="0" algn="bl" rotWithShape="0" blurRad="88900" dist="38100" dir="5400000">
+            <a:outerShdw blurRad="88900" dist="38100" dir="5400000" algn="bl" rotWithShape="0">
               <a:srgbClr val="000000">
                 <a:alpha val="13000"/>
               </a:srgbClr>
             </a:outerShdw>
           </a:effectLst>
         </p:spPr>
+        <p:txBody>
+          <a:bodyPr/>
+          <a:lstStyle/>
+          <a:p>
+            <a:endParaRPr lang="es-CR"/>
+          </a:p>
+        </p:txBody>
       </p:sp>
       <p:sp>
         <p:nvSpPr>
@@ -2931,7 +2760,7 @@
           <a:bodyPr wrap="square" lIns="0" tIns="0" rIns="0" bIns="0" rtlCol="0" anchor="ctr"/>
           <a:lstStyle/>
           <a:p>
-            <a:pPr indent="0" marL="0">
+            <a:pPr marL="0" indent="0">
               <a:buNone/>
             </a:pPr>
             <a:r>
@@ -2970,7 +2799,7 @@
           <a:bodyPr wrap="square" lIns="0" tIns="0" rIns="0" bIns="0" rtlCol="0" anchor="ctr"/>
           <a:lstStyle/>
           <a:p>
-            <a:pPr indent="0" marL="0">
+            <a:pPr marL="0" indent="0">
               <a:buNone/>
             </a:pPr>
             <a:r>
@@ -3009,7 +2838,7 @@
           <a:bodyPr wrap="square" lIns="0" tIns="0" rIns="0" bIns="0" rtlCol="0" anchor="ctr"/>
           <a:lstStyle/>
           <a:p>
-            <a:pPr algn="r" indent="0" marL="0">
+            <a:pPr marL="0" indent="0" algn="r">
               <a:buNone/>
             </a:pPr>
             <a:r>
@@ -3048,7 +2877,7 @@
           <a:bodyPr wrap="square" lIns="0" tIns="0" rIns="0" bIns="0" rtlCol="0" anchor="ctr"/>
           <a:lstStyle/>
           <a:p>
-            <a:pPr algn="l" indent="0" marL="0">
+            <a:pPr marL="0" indent="0" algn="l">
               <a:buNone/>
             </a:pPr>
             <a:r>
@@ -3087,7 +2916,7 @@
           <a:bodyPr wrap="square" lIns="0" tIns="0" rIns="0" bIns="0" rtlCol="0" anchor="ctr"/>
           <a:lstStyle/>
           <a:p>
-            <a:pPr algn="r" indent="0" marL="0">
+            <a:pPr marL="0" indent="0" algn="r">
               <a:buNone/>
             </a:pPr>
             <a:r>
@@ -3121,6 +2950,7 @@
         <a:solidFill>
           <a:srgbClr val="FFFFFF"/>
         </a:solidFill>
+        <a:effectLst/>
       </p:bgPr>
     </p:bg>
     <p:spTree>
@@ -3158,11 +2988,11 @@
           <a:bodyPr wrap="square" lIns="0" tIns="0" rIns="0" bIns="0" rtlCol="0" anchor="ctr"/>
           <a:lstStyle/>
           <a:p>
-            <a:pPr indent="0" marL="0">
-              <a:buNone/>
-            </a:pPr>
-            <a:r>
-              <a:rPr lang="en-US" sz="1200" b="1" spc="200" kern="0" dirty="0">
+            <a:pPr marL="0" indent="0">
+              <a:buNone/>
+            </a:pPr>
+            <a:r>
+              <a:rPr lang="en-US" sz="1200" b="1" kern="0" spc="200" dirty="0">
                 <a:solidFill>
                   <a:srgbClr val="0E7C86"/>
                 </a:solidFill>
@@ -3197,7 +3027,7 @@
           <a:bodyPr wrap="square" lIns="0" tIns="0" rIns="0" bIns="0" rtlCol="0" anchor="ctr"/>
           <a:lstStyle/>
           <a:p>
-            <a:pPr indent="0" marL="0">
+            <a:pPr marL="0" indent="0">
               <a:buNone/>
             </a:pPr>
             <a:r>
@@ -3339,13 +3169,20 @@
           </a:solidFill>
           <a:ln/>
           <a:effectLst>
-            <a:outerShdw sx="100000" sy="100000" kx="0" ky="0" algn="bl" rotWithShape="0" blurRad="88900" dist="38100" dir="5400000">
+            <a:outerShdw blurRad="88900" dist="38100" dir="5400000" algn="bl" rotWithShape="0">
               <a:srgbClr val="000000">
                 <a:alpha val="13000"/>
               </a:srgbClr>
             </a:outerShdw>
           </a:effectLst>
         </p:spPr>
+        <p:txBody>
+          <a:bodyPr/>
+          <a:lstStyle/>
+          <a:p>
+            <a:endParaRPr lang="es-CR"/>
+          </a:p>
+        </p:txBody>
       </p:sp>
       <p:sp>
         <p:nvSpPr>
@@ -3368,11 +3205,11 @@
           <a:bodyPr wrap="square" lIns="0" tIns="0" rIns="0" bIns="0" rtlCol="0" anchor="ctr"/>
           <a:lstStyle/>
           <a:p>
-            <a:pPr indent="0" marL="0">
-              <a:buNone/>
-            </a:pPr>
-            <a:r>
-              <a:rPr lang="en-US" sz="1300" b="1" spc="100" kern="0" dirty="0">
+            <a:pPr marL="0" indent="0">
+              <a:buNone/>
+            </a:pPr>
+            <a:r>
+              <a:rPr lang="en-US" sz="1300" b="1" kern="0" spc="100" dirty="0">
                 <a:solidFill>
                   <a:srgbClr val="1FB6A6"/>
                 </a:solidFill>
@@ -3407,7 +3244,7 @@
           <a:bodyPr wrap="square" lIns="0" tIns="0" rIns="0" bIns="0" rtlCol="0" anchor="t"/>
           <a:lstStyle/>
           <a:p>
-            <a:pPr indent="0" marL="0">
+            <a:pPr marL="0" indent="0">
               <a:buNone/>
             </a:pPr>
             <a:r>
@@ -3446,7 +3283,7 @@
           <a:bodyPr wrap="square" lIns="0" tIns="0" rIns="0" bIns="0" rtlCol="0" anchor="ctr"/>
           <a:lstStyle/>
           <a:p>
-            <a:pPr algn="l" indent="0" marL="0">
+            <a:pPr marL="0" indent="0" algn="l">
               <a:buNone/>
             </a:pPr>
             <a:r>
@@ -3485,7 +3322,7 @@
           <a:bodyPr wrap="square" lIns="0" tIns="0" rIns="0" bIns="0" rtlCol="0" anchor="ctr"/>
           <a:lstStyle/>
           <a:p>
-            <a:pPr algn="r" indent="0" marL="0">
+            <a:pPr marL="0" indent="0" algn="r">
               <a:buNone/>
             </a:pPr>
             <a:r>
@@ -3519,6 +3356,7 @@
         <a:solidFill>
           <a:srgbClr val="0E2A38"/>
         </a:solidFill>
+        <a:effectLst/>
       </p:bgPr>
     </p:bg>
     <p:spTree>
@@ -3556,6 +3394,13 @@
           </a:solidFill>
           <a:ln/>
         </p:spPr>
+        <p:txBody>
+          <a:bodyPr/>
+          <a:lstStyle/>
+          <a:p>
+            <a:endParaRPr lang="es-CR"/>
+          </a:p>
+        </p:txBody>
       </p:sp>
       <p:sp>
         <p:nvSpPr>
@@ -3578,6 +3423,13 @@
           </a:solidFill>
           <a:ln/>
         </p:spPr>
+        <p:txBody>
+          <a:bodyPr/>
+          <a:lstStyle/>
+          <a:p>
+            <a:endParaRPr lang="es-CR"/>
+          </a:p>
+        </p:txBody>
       </p:sp>
       <p:sp>
         <p:nvSpPr>
@@ -3600,7 +3452,7 @@
           <a:bodyPr wrap="square" lIns="0" tIns="0" rIns="0" bIns="0" rtlCol="0" anchor="ctr"/>
           <a:lstStyle/>
           <a:p>
-            <a:pPr indent="0" marL="0">
+            <a:pPr marL="0" indent="0">
               <a:buNone/>
             </a:pPr>
             <a:r>
@@ -3639,7 +3491,7 @@
           <a:bodyPr wrap="square" lIns="0" tIns="0" rIns="0" bIns="0" rtlCol="0" anchor="ctr"/>
           <a:lstStyle/>
           <a:p>
-            <a:pPr indent="0" marL="0">
+            <a:pPr marL="0" indent="0">
               <a:buNone/>
             </a:pPr>
             <a:r>
@@ -3678,7 +3530,7 @@
           <a:bodyPr wrap="square" lIns="0" tIns="0" rIns="0" bIns="0" rtlCol="0" anchor="ctr"/>
           <a:lstStyle/>
           <a:p>
-            <a:pPr indent="0" marL="0">
+            <a:pPr marL="0" indent="0">
               <a:buNone/>
             </a:pPr>
             <a:r>
@@ -3695,7 +3547,7 @@
             <a:endParaRPr lang="en-US" sz="1600" dirty="0"/>
           </a:p>
           <a:p>
-            <a:pPr indent="0" marL="0">
+            <a:pPr marL="0" indent="0">
               <a:buNone/>
             </a:pPr>
             <a:r>
@@ -3729,6 +3581,7 @@
         <a:solidFill>
           <a:srgbClr val="FFFFFF"/>
         </a:solidFill>
+        <a:effectLst/>
       </p:bgPr>
     </p:bg>
     <p:spTree>
@@ -3766,11 +3619,11 @@
           <a:bodyPr wrap="square" lIns="0" tIns="0" rIns="0" bIns="0" rtlCol="0" anchor="ctr"/>
           <a:lstStyle/>
           <a:p>
-            <a:pPr indent="0" marL="0">
-              <a:buNone/>
-            </a:pPr>
-            <a:r>
-              <a:rPr lang="en-US" sz="1200" b="1" spc="200" kern="0" dirty="0">
+            <a:pPr marL="0" indent="0">
+              <a:buNone/>
+            </a:pPr>
+            <a:r>
+              <a:rPr lang="en-US" sz="1200" b="1" kern="0" spc="200" dirty="0">
                 <a:solidFill>
                   <a:srgbClr val="0E7C86"/>
                 </a:solidFill>
@@ -3805,7 +3658,7 @@
           <a:bodyPr wrap="square" lIns="0" tIns="0" rIns="0" bIns="0" rtlCol="0" anchor="ctr"/>
           <a:lstStyle/>
           <a:p>
-            <a:pPr indent="0" marL="0">
+            <a:pPr marL="0" indent="0">
               <a:buNone/>
             </a:pPr>
             <a:r>
@@ -3947,13 +3800,20 @@
           </a:solidFill>
           <a:ln/>
           <a:effectLst>
-            <a:outerShdw sx="100000" sy="100000" kx="0" ky="0" algn="bl" rotWithShape="0" blurRad="88900" dist="38100" dir="5400000">
+            <a:outerShdw blurRad="88900" dist="38100" dir="5400000" algn="bl" rotWithShape="0">
               <a:srgbClr val="000000">
                 <a:alpha val="13000"/>
               </a:srgbClr>
             </a:outerShdw>
           </a:effectLst>
         </p:spPr>
+        <p:txBody>
+          <a:bodyPr/>
+          <a:lstStyle/>
+          <a:p>
+            <a:endParaRPr lang="es-CR"/>
+          </a:p>
+        </p:txBody>
       </p:sp>
       <p:sp>
         <p:nvSpPr>
@@ -3976,11 +3836,11 @@
           <a:bodyPr wrap="square" lIns="0" tIns="0" rIns="0" bIns="0" rtlCol="0" anchor="ctr"/>
           <a:lstStyle/>
           <a:p>
-            <a:pPr indent="0" marL="0">
-              <a:buNone/>
-            </a:pPr>
-            <a:r>
-              <a:rPr lang="en-US" sz="1300" b="1" spc="200" kern="0" dirty="0">
+            <a:pPr marL="0" indent="0">
+              <a:buNone/>
+            </a:pPr>
+            <a:r>
+              <a:rPr lang="en-US" sz="1300" b="1" kern="0" spc="200" dirty="0">
                 <a:solidFill>
                   <a:srgbClr val="1FB6A6"/>
                 </a:solidFill>
@@ -4015,7 +3875,7 @@
           <a:bodyPr wrap="square" lIns="0" tIns="0" rIns="0" bIns="0" rtlCol="0" anchor="t"/>
           <a:lstStyle/>
           <a:p>
-            <a:pPr indent="0" marL="0">
+            <a:pPr marL="0" indent="0">
               <a:buNone/>
             </a:pPr>
             <a:r>
@@ -4054,7 +3914,7 @@
           <a:bodyPr wrap="square" lIns="0" tIns="0" rIns="0" bIns="0" rtlCol="0" anchor="ctr"/>
           <a:lstStyle/>
           <a:p>
-            <a:pPr algn="l" indent="0" marL="0">
+            <a:pPr marL="0" indent="0" algn="l">
               <a:buNone/>
             </a:pPr>
             <a:r>
@@ -4093,7 +3953,7 @@
           <a:bodyPr wrap="square" lIns="0" tIns="0" rIns="0" bIns="0" rtlCol="0" anchor="ctr"/>
           <a:lstStyle/>
           <a:p>
-            <a:pPr algn="r" indent="0" marL="0">
+            <a:pPr marL="0" indent="0" algn="r">
               <a:buNone/>
             </a:pPr>
             <a:r>
@@ -4127,6 +3987,7 @@
         <a:solidFill>
           <a:srgbClr val="FFFFFF"/>
         </a:solidFill>
+        <a:effectLst/>
       </p:bgPr>
     </p:bg>
     <p:spTree>
@@ -4164,11 +4025,11 @@
           <a:bodyPr wrap="square" lIns="0" tIns="0" rIns="0" bIns="0" rtlCol="0" anchor="ctr"/>
           <a:lstStyle/>
           <a:p>
-            <a:pPr indent="0" marL="0">
-              <a:buNone/>
-            </a:pPr>
-            <a:r>
-              <a:rPr lang="en-US" sz="1200" b="1" spc="200" kern="0" dirty="0">
+            <a:pPr marL="0" indent="0">
+              <a:buNone/>
+            </a:pPr>
+            <a:r>
+              <a:rPr lang="en-US" sz="1200" b="1" kern="0" spc="200" dirty="0">
                 <a:solidFill>
                   <a:srgbClr val="0E7C86"/>
                 </a:solidFill>
@@ -4203,7 +4064,7 @@
           <a:bodyPr wrap="square" lIns="0" tIns="0" rIns="0" bIns="0" rtlCol="0" anchor="ctr"/>
           <a:lstStyle/>
           <a:p>
-            <a:pPr indent="0" marL="0">
+            <a:pPr marL="0" indent="0">
               <a:buNone/>
             </a:pPr>
             <a:r>
@@ -4242,13 +4103,20 @@
           </a:solidFill>
           <a:ln/>
           <a:effectLst>
-            <a:outerShdw sx="100000" sy="100000" kx="0" ky="0" algn="bl" rotWithShape="0" blurRad="88900" dist="38100" dir="5400000">
+            <a:outerShdw blurRad="88900" dist="38100" dir="5400000" algn="bl" rotWithShape="0">
               <a:srgbClr val="000000">
                 <a:alpha val="13000"/>
               </a:srgbClr>
             </a:outerShdw>
           </a:effectLst>
         </p:spPr>
+        <p:txBody>
+          <a:bodyPr/>
+          <a:lstStyle/>
+          <a:p>
+            <a:endParaRPr lang="es-CR"/>
+          </a:p>
+        </p:txBody>
       </p:sp>
       <p:sp>
         <p:nvSpPr>
@@ -4269,13 +4137,20 @@
           </a:solidFill>
           <a:ln/>
           <a:effectLst>
-            <a:outerShdw sx="100000" sy="100000" kx="0" ky="0" algn="bl" rotWithShape="0" blurRad="88900" dist="38100" dir="5400000">
+            <a:outerShdw blurRad="88900" dist="38100" dir="5400000" algn="bl" rotWithShape="0">
               <a:srgbClr val="000000">
                 <a:alpha val="13000"/>
               </a:srgbClr>
             </a:outerShdw>
           </a:effectLst>
         </p:spPr>
+        <p:txBody>
+          <a:bodyPr/>
+          <a:lstStyle/>
+          <a:p>
+            <a:endParaRPr lang="es-CR"/>
+          </a:p>
+        </p:txBody>
       </p:sp>
       <p:sp>
         <p:nvSpPr>
@@ -4298,7 +4173,7 @@
           <a:bodyPr wrap="square" lIns="0" tIns="0" rIns="0" bIns="0" rtlCol="0" anchor="ctr"/>
           <a:lstStyle/>
           <a:p>
-            <a:pPr algn="ctr" indent="0" marL="0">
+            <a:pPr marL="0" indent="0" algn="ctr">
               <a:buNone/>
             </a:pPr>
             <a:r>
@@ -4337,7 +4212,7 @@
           <a:bodyPr wrap="square" lIns="0" tIns="0" rIns="0" bIns="0" rtlCol="0" anchor="ctr"/>
           <a:lstStyle/>
           <a:p>
-            <a:pPr indent="0" marL="0">
+            <a:pPr marL="0" indent="0">
               <a:buNone/>
             </a:pPr>
             <a:r>
@@ -4376,7 +4251,7 @@
           <a:bodyPr wrap="square" lIns="0" tIns="0" rIns="0" bIns="0" rtlCol="0" anchor="t"/>
           <a:lstStyle/>
           <a:p>
-            <a:pPr indent="0" marL="0">
+            <a:pPr marL="0" indent="0">
               <a:buNone/>
             </a:pPr>
             <a:r>
@@ -4415,13 +4290,20 @@
           </a:solidFill>
           <a:ln/>
           <a:effectLst>
-            <a:outerShdw sx="100000" sy="100000" kx="0" ky="0" algn="bl" rotWithShape="0" blurRad="88900" dist="38100" dir="5400000">
+            <a:outerShdw blurRad="88900" dist="38100" dir="5400000" algn="bl" rotWithShape="0">
               <a:srgbClr val="000000">
                 <a:alpha val="13000"/>
               </a:srgbClr>
             </a:outerShdw>
           </a:effectLst>
         </p:spPr>
+        <p:txBody>
+          <a:bodyPr/>
+          <a:lstStyle/>
+          <a:p>
+            <a:endParaRPr lang="es-CR"/>
+          </a:p>
+        </p:txBody>
       </p:sp>
       <p:sp>
         <p:nvSpPr>
@@ -4442,13 +4324,20 @@
           </a:solidFill>
           <a:ln/>
           <a:effectLst>
-            <a:outerShdw sx="100000" sy="100000" kx="0" ky="0" algn="bl" rotWithShape="0" blurRad="88900" dist="38100" dir="5400000">
+            <a:outerShdw blurRad="88900" dist="38100" dir="5400000" algn="bl" rotWithShape="0">
               <a:srgbClr val="000000">
                 <a:alpha val="13000"/>
               </a:srgbClr>
             </a:outerShdw>
           </a:effectLst>
         </p:spPr>
+        <p:txBody>
+          <a:bodyPr/>
+          <a:lstStyle/>
+          <a:p>
+            <a:endParaRPr lang="es-CR"/>
+          </a:p>
+        </p:txBody>
       </p:sp>
       <p:sp>
         <p:nvSpPr>
@@ -4471,7 +4360,7 @@
           <a:bodyPr wrap="square" lIns="0" tIns="0" rIns="0" bIns="0" rtlCol="0" anchor="ctr"/>
           <a:lstStyle/>
           <a:p>
-            <a:pPr algn="ctr" indent="0" marL="0">
+            <a:pPr marL="0" indent="0" algn="ctr">
               <a:buNone/>
             </a:pPr>
             <a:r>
@@ -4510,7 +4399,7 @@
           <a:bodyPr wrap="square" lIns="0" tIns="0" rIns="0" bIns="0" rtlCol="0" anchor="ctr"/>
           <a:lstStyle/>
           <a:p>
-            <a:pPr indent="0" marL="0">
+            <a:pPr marL="0" indent="0">
               <a:buNone/>
             </a:pPr>
             <a:r>
@@ -4549,7 +4438,7 @@
           <a:bodyPr wrap="square" lIns="0" tIns="0" rIns="0" bIns="0" rtlCol="0" anchor="t"/>
           <a:lstStyle/>
           <a:p>
-            <a:pPr indent="0" marL="0">
+            <a:pPr marL="0" indent="0">
               <a:buNone/>
             </a:pPr>
             <a:r>
@@ -4588,13 +4477,20 @@
           </a:solidFill>
           <a:ln/>
           <a:effectLst>
-            <a:outerShdw sx="100000" sy="100000" kx="0" ky="0" algn="bl" rotWithShape="0" blurRad="88900" dist="38100" dir="5400000">
+            <a:outerShdw blurRad="88900" dist="38100" dir="5400000" algn="bl" rotWithShape="0">
               <a:srgbClr val="000000">
                 <a:alpha val="13000"/>
               </a:srgbClr>
             </a:outerShdw>
           </a:effectLst>
         </p:spPr>
+        <p:txBody>
+          <a:bodyPr/>
+          <a:lstStyle/>
+          <a:p>
+            <a:endParaRPr lang="es-CR"/>
+          </a:p>
+        </p:txBody>
       </p:sp>
       <p:sp>
         <p:nvSpPr>
@@ -4615,13 +4511,20 @@
           </a:solidFill>
           <a:ln/>
           <a:effectLst>
-            <a:outerShdw sx="100000" sy="100000" kx="0" ky="0" algn="bl" rotWithShape="0" blurRad="88900" dist="38100" dir="5400000">
+            <a:outerShdw blurRad="88900" dist="38100" dir="5400000" algn="bl" rotWithShape="0">
               <a:srgbClr val="000000">
                 <a:alpha val="13000"/>
               </a:srgbClr>
             </a:outerShdw>
           </a:effectLst>
         </p:spPr>
+        <p:txBody>
+          <a:bodyPr/>
+          <a:lstStyle/>
+          <a:p>
+            <a:endParaRPr lang="es-CR"/>
+          </a:p>
+        </p:txBody>
       </p:sp>
       <p:sp>
         <p:nvSpPr>
@@ -4644,7 +4547,7 @@
           <a:bodyPr wrap="square" lIns="0" tIns="0" rIns="0" bIns="0" rtlCol="0" anchor="ctr"/>
           <a:lstStyle/>
           <a:p>
-            <a:pPr algn="ctr" indent="0" marL="0">
+            <a:pPr marL="0" indent="0" algn="ctr">
               <a:buNone/>
             </a:pPr>
             <a:r>
@@ -4683,7 +4586,7 @@
           <a:bodyPr wrap="square" lIns="0" tIns="0" rIns="0" bIns="0" rtlCol="0" anchor="ctr"/>
           <a:lstStyle/>
           <a:p>
-            <a:pPr indent="0" marL="0">
+            <a:pPr marL="0" indent="0">
               <a:buNone/>
             </a:pPr>
             <a:r>
@@ -4722,7 +4625,7 @@
           <a:bodyPr wrap="square" lIns="0" tIns="0" rIns="0" bIns="0" rtlCol="0" anchor="t"/>
           <a:lstStyle/>
           <a:p>
-            <a:pPr indent="0" marL="0">
+            <a:pPr marL="0" indent="0">
               <a:buNone/>
             </a:pPr>
             <a:r>
@@ -4761,7 +4664,7 @@
           <a:bodyPr wrap="square" lIns="0" tIns="0" rIns="0" bIns="0" rtlCol="0" anchor="ctr"/>
           <a:lstStyle/>
           <a:p>
-            <a:pPr algn="l" indent="0" marL="0">
+            <a:pPr marL="0" indent="0" algn="l">
               <a:buNone/>
             </a:pPr>
             <a:r>
@@ -4800,7 +4703,7 @@
           <a:bodyPr wrap="square" lIns="0" tIns="0" rIns="0" bIns="0" rtlCol="0" anchor="ctr"/>
           <a:lstStyle/>
           <a:p>
-            <a:pPr algn="r" indent="0" marL="0">
+            <a:pPr marL="0" indent="0" algn="r">
               <a:buNone/>
             </a:pPr>
             <a:r>
@@ -4834,6 +4737,7 @@
         <a:solidFill>
           <a:srgbClr val="FFFFFF"/>
         </a:solidFill>
+        <a:effectLst/>
       </p:bgPr>
     </p:bg>
     <p:spTree>
@@ -4871,11 +4775,11 @@
           <a:bodyPr wrap="square" lIns="0" tIns="0" rIns="0" bIns="0" rtlCol="0" anchor="ctr"/>
           <a:lstStyle/>
           <a:p>
-            <a:pPr indent="0" marL="0">
-              <a:buNone/>
-            </a:pPr>
-            <a:r>
-              <a:rPr lang="en-US" sz="1200" b="1" spc="200" kern="0" dirty="0">
+            <a:pPr marL="0" indent="0">
+              <a:buNone/>
+            </a:pPr>
+            <a:r>
+              <a:rPr lang="en-US" sz="1200" b="1" kern="0" spc="200" dirty="0">
                 <a:solidFill>
                   <a:srgbClr val="0E7C86"/>
                 </a:solidFill>
@@ -4910,7 +4814,7 @@
           <a:bodyPr wrap="square" lIns="0" tIns="0" rIns="0" bIns="0" rtlCol="0" anchor="ctr"/>
           <a:lstStyle/>
           <a:p>
-            <a:pPr indent="0" marL="0">
+            <a:pPr marL="0" indent="0">
               <a:buNone/>
             </a:pPr>
             <a:r>
@@ -4947,6 +4851,13 @@
           </a:solidFill>
           <a:ln/>
         </p:spPr>
+        <p:txBody>
+          <a:bodyPr/>
+          <a:lstStyle/>
+          <a:p>
+            <a:endParaRPr lang="es-CR"/>
+          </a:p>
+        </p:txBody>
       </p:sp>
       <p:sp>
         <p:nvSpPr>
@@ -4969,7 +4880,7 @@
           <a:bodyPr wrap="square" lIns="0" tIns="0" rIns="0" bIns="0" rtlCol="0" anchor="ctr"/>
           <a:lstStyle/>
           <a:p>
-            <a:pPr indent="0" marL="0">
+            <a:pPr marL="0" indent="0">
               <a:buNone/>
             </a:pPr>
             <a:r>
@@ -5008,7 +4919,7 @@
           <a:bodyPr wrap="square" lIns="0" tIns="0" rIns="0" bIns="0" rtlCol="0" anchor="t"/>
           <a:lstStyle/>
           <a:p>
-            <a:pPr indent="0" marL="0">
+            <a:pPr marL="0" indent="0">
               <a:buNone/>
             </a:pPr>
             <a:r>
@@ -5045,6 +4956,13 @@
           </a:solidFill>
           <a:ln/>
         </p:spPr>
+        <p:txBody>
+          <a:bodyPr/>
+          <a:lstStyle/>
+          <a:p>
+            <a:endParaRPr lang="es-CR"/>
+          </a:p>
+        </p:txBody>
       </p:sp>
       <p:sp>
         <p:nvSpPr>
@@ -5067,7 +4985,7 @@
           <a:bodyPr wrap="square" lIns="0" tIns="0" rIns="0" bIns="0" rtlCol="0" anchor="ctr"/>
           <a:lstStyle/>
           <a:p>
-            <a:pPr indent="0" marL="0">
+            <a:pPr marL="0" indent="0">
               <a:buNone/>
             </a:pPr>
             <a:r>
@@ -5106,7 +5024,7 @@
           <a:bodyPr wrap="square" lIns="0" tIns="0" rIns="0" bIns="0" rtlCol="0" anchor="t"/>
           <a:lstStyle/>
           <a:p>
-            <a:pPr indent="0" marL="0">
+            <a:pPr marL="0" indent="0">
               <a:buNone/>
             </a:pPr>
             <a:r>
@@ -5143,6 +5061,13 @@
           </a:solidFill>
           <a:ln/>
         </p:spPr>
+        <p:txBody>
+          <a:bodyPr/>
+          <a:lstStyle/>
+          <a:p>
+            <a:endParaRPr lang="es-CR"/>
+          </a:p>
+        </p:txBody>
       </p:sp>
       <p:sp>
         <p:nvSpPr>
@@ -5165,7 +5090,7 @@
           <a:bodyPr wrap="square" lIns="0" tIns="0" rIns="0" bIns="0" rtlCol="0" anchor="ctr"/>
           <a:lstStyle/>
           <a:p>
-            <a:pPr indent="0" marL="0">
+            <a:pPr marL="0" indent="0">
               <a:buNone/>
             </a:pPr>
             <a:r>
@@ -5204,7 +5129,7 @@
           <a:bodyPr wrap="square" lIns="0" tIns="0" rIns="0" bIns="0" rtlCol="0" anchor="t"/>
           <a:lstStyle/>
           <a:p>
-            <a:pPr indent="0" marL="0">
+            <a:pPr marL="0" indent="0">
               <a:buNone/>
             </a:pPr>
             <a:r>
@@ -5241,6 +5166,13 @@
           </a:solidFill>
           <a:ln/>
         </p:spPr>
+        <p:txBody>
+          <a:bodyPr/>
+          <a:lstStyle/>
+          <a:p>
+            <a:endParaRPr lang="es-CR"/>
+          </a:p>
+        </p:txBody>
       </p:sp>
       <p:sp>
         <p:nvSpPr>
@@ -5263,7 +5195,7 @@
           <a:bodyPr wrap="square" lIns="0" tIns="0" rIns="0" bIns="0" rtlCol="0" anchor="ctr"/>
           <a:lstStyle/>
           <a:p>
-            <a:pPr indent="0" marL="0">
+            <a:pPr marL="0" indent="0">
               <a:buNone/>
             </a:pPr>
             <a:r>
@@ -5302,7 +5234,7 @@
           <a:bodyPr wrap="square" lIns="0" tIns="0" rIns="0" bIns="0" rtlCol="0" anchor="t"/>
           <a:lstStyle/>
           <a:p>
-            <a:pPr indent="0" marL="0">
+            <a:pPr marL="0" indent="0">
               <a:buNone/>
             </a:pPr>
             <a:r>
@@ -5322,15 +5254,15 @@
       </p:sp>
       <p:pic>
         <p:nvPicPr>
-          <p:cNvPr id="16" name="Image 0" descr="ariel.png">    </p:cNvPr>
+          <p:cNvPr id="16" name="Image 0" descr="ariel.png"/>
           <p:cNvPicPr>
             <a:picLocks noChangeAspect="1"/>
           </p:cNvPicPr>
           <p:nvPr/>
         </p:nvPicPr>
         <p:blipFill>
-          <a:blip r:embed="rId1"/>
-          <a:srcRect l="0" r="0" t="0" b="0"/>
+          <a:blip r:embed="rId3"/>
+          <a:srcRect/>
           <a:stretch/>
         </p:blipFill>
         <p:spPr>
@@ -5364,7 +5296,7 @@
           <a:bodyPr wrap="square" lIns="0" tIns="0" rIns="0" bIns="0" rtlCol="0" anchor="ctr"/>
           <a:lstStyle/>
           <a:p>
-            <a:pPr algn="ctr" indent="0" marL="0">
+            <a:pPr marL="0" indent="0" algn="ctr">
               <a:buNone/>
             </a:pPr>
             <a:r>
@@ -5403,7 +5335,7 @@
           <a:bodyPr wrap="square" lIns="0" tIns="0" rIns="0" bIns="0" rtlCol="0" anchor="ctr"/>
           <a:lstStyle/>
           <a:p>
-            <a:pPr algn="l" indent="0" marL="0">
+            <a:pPr marL="0" indent="0" algn="l">
               <a:buNone/>
             </a:pPr>
             <a:r>
@@ -5442,7 +5374,7 @@
           <a:bodyPr wrap="square" lIns="0" tIns="0" rIns="0" bIns="0" rtlCol="0" anchor="ctr"/>
           <a:lstStyle/>
           <a:p>
-            <a:pPr algn="r" indent="0" marL="0">
+            <a:pPr marL="0" indent="0" algn="r">
               <a:buNone/>
             </a:pPr>
             <a:r>
@@ -5476,6 +5408,7 @@
         <a:solidFill>
           <a:srgbClr val="0E2A38"/>
         </a:solidFill>
+        <a:effectLst/>
       </p:bgPr>
     </p:bg>
     <p:spTree>
@@ -5513,11 +5446,11 @@
           <a:bodyPr wrap="square" lIns="0" tIns="0" rIns="0" bIns="0" rtlCol="0" anchor="ctr"/>
           <a:lstStyle/>
           <a:p>
-            <a:pPr indent="0" marL="0">
-              <a:buNone/>
-            </a:pPr>
-            <a:r>
-              <a:rPr lang="en-US" sz="1300" b="1" spc="300" kern="0" dirty="0">
+            <a:pPr marL="0" indent="0">
+              <a:buNone/>
+            </a:pPr>
+            <a:r>
+              <a:rPr lang="en-US" sz="1300" b="1" kern="0" spc="300" dirty="0">
                 <a:solidFill>
                   <a:srgbClr val="1FB6A6"/>
                 </a:solidFill>
@@ -5552,7 +5485,7 @@
           <a:bodyPr wrap="square" lIns="0" tIns="0" rIns="0" bIns="0" rtlCol="0" anchor="ctr"/>
           <a:lstStyle/>
           <a:p>
-            <a:pPr indent="0" marL="0">
+            <a:pPr marL="0" indent="0">
               <a:buNone/>
             </a:pPr>
             <a:r>
@@ -5572,15 +5505,15 @@
       </p:sp>
       <p:pic>
         <p:nvPicPr>
-          <p:cNvPr id="4" name="Image 0" descr="ariel.png">    </p:cNvPr>
+          <p:cNvPr id="4" name="Image 0" descr="ariel.png"/>
           <p:cNvPicPr>
             <a:picLocks noChangeAspect="1"/>
           </p:cNvPicPr>
           <p:nvPr/>
         </p:nvPicPr>
         <p:blipFill>
-          <a:blip r:embed="rId1"/>
-          <a:srcRect l="0" r="0" t="0" b="0"/>
+          <a:blip r:embed="rId4"/>
+          <a:srcRect/>
           <a:stretch/>
         </p:blipFill>
         <p:spPr>
@@ -5619,6 +5552,13 @@
             <a:prstDash val="dash"/>
           </a:ln>
         </p:spPr>
+        <p:txBody>
+          <a:bodyPr/>
+          <a:lstStyle/>
+          <a:p>
+            <a:endParaRPr lang="es-CR"/>
+          </a:p>
+        </p:txBody>
       </p:sp>
       <p:sp>
         <p:nvSpPr>
@@ -5641,7 +5581,7 @@
           <a:bodyPr wrap="square" lIns="0" tIns="0" rIns="0" bIns="0" rtlCol="0" anchor="ctr"/>
           <a:lstStyle/>
           <a:p>
-            <a:pPr indent="0" marL="0">
+            <a:pPr marL="0" indent="0">
               <a:buNone/>
             </a:pPr>
             <a:r>
@@ -5680,68 +5620,189 @@
           <a:bodyPr wrap="square" lIns="0" tIns="0" rIns="0" bIns="0" rtlCol="0" anchor="t"/>
           <a:lstStyle/>
           <a:p>
-            <a:pPr indent="0" marL="0">
+            <a:pPr marL="0" indent="0">
               <a:spcAft>
                 <a:spcPts val="800"/>
               </a:spcAft>
               <a:buNone/>
             </a:pPr>
-            <a:r>
-              <a:rPr lang="en-US" sz="1350" dirty="0">
-                <a:solidFill>
-                  <a:srgbClr val="CFE3E6"/>
-                </a:solidFill>
-                <a:latin typeface="Calibri" pitchFamily="34" charset="0"/>
-                <a:ea typeface="Calibri" pitchFamily="34" charset="-122"/>
-                <a:cs typeface="Calibri" pitchFamily="34" charset="-120"/>
-              </a:rPr>
-              <a:t>Insertar aquí el enlace al video (~5 min, YouTube no listado).</a:t>
-            </a:r>
             <a:endParaRPr lang="en-US" sz="1350" dirty="0"/>
           </a:p>
-          <a:p>
-            <a:pPr marL="342900" indent="-342900">
-              <a:buSzPct val="100000"/>
-              <a:buChar char="•"/>
-            </a:pPr>
-            <a:r>
-              <a:rPr lang="en-US" sz="1350" dirty="0">
-                <a:solidFill>
-                  <a:srgbClr val="CFE3E6"/>
-                </a:solidFill>
-                <a:latin typeface="Calibri" pitchFamily="34" charset="0"/>
-                <a:ea typeface="Calibri" pitchFamily="34" charset="-122"/>
-                <a:cs typeface="Calibri" pitchFamily="34" charset="-120"/>
-              </a:rPr>
-              <a:t>Escenario 1 — Condición A (AVC): consulta por voz, avatar responde.</a:t>
-            </a:r>
-            <a:endParaRPr lang="en-US" sz="1350" dirty="0"/>
-          </a:p>
-          <a:p>
-            <a:pPr marL="342900" indent="-342900">
-              <a:buSzPct val="100000"/>
-              <a:buChar char="•"/>
-            </a:pPr>
-            <a:r>
-              <a:rPr lang="en-US" sz="1350" dirty="0">
-                <a:solidFill>
-                  <a:srgbClr val="CFE3E6"/>
-                </a:solidFill>
-                <a:latin typeface="Calibri" pitchFamily="34" charset="0"/>
-                <a:ea typeface="Calibri" pitchFamily="34" charset="-122"/>
-                <a:cs typeface="Calibri" pitchFamily="34" charset="-120"/>
-              </a:rPr>
-              <a:t>Escenario 2 — Condición B (texto): misma consulta, interfaz textual.</a:t>
-            </a:r>
-            <a:endParaRPr lang="en-US" sz="1350" dirty="0"/>
-          </a:p>
-        </p:txBody>
-      </p:sp>
+        </p:txBody>
+      </p:sp>
+      <p:pic>
+        <p:nvPicPr>
+          <p:cNvPr id="8" name="Elementos multimedia en línea 7" title="Ariel - Uso Textua y CVA">
+            <a:hlinkClick r:id="" action="ppaction://media"/>
+            <a:extLst>
+              <a:ext uri="{FF2B5EF4-FFF2-40B4-BE49-F238E27FC236}">
+                <a16:creationId xmlns:a16="http://schemas.microsoft.com/office/drawing/2014/main" id="{F9F297F0-DF28-0738-5741-F92553B76136}"/>
+              </a:ext>
+            </a:extLst>
+          </p:cNvPr>
+          <p:cNvPicPr>
+            <a:picLocks noRot="1" noChangeAspect="1"/>
+          </p:cNvPicPr>
+          <p:nvPr>
+            <a:videoFile r:link="rId1"/>
+          </p:nvPr>
+        </p:nvPicPr>
+        <p:blipFill>
+          <a:blip r:embed="rId5"/>
+          <a:stretch>
+            <a:fillRect/>
+          </a:stretch>
+        </p:blipFill>
+        <p:spPr>
+          <a:xfrm>
+            <a:off x="8038623" y="2880360"/>
+            <a:ext cx="3437097" cy="1941964"/>
+          </a:xfrm>
+          <a:prstGeom prst="rect">
+            <a:avLst/>
+          </a:prstGeom>
+        </p:spPr>
+      </p:pic>
     </p:spTree>
   </p:cSld>
   <p:clrMapOvr>
     <a:masterClrMapping/>
   </p:clrMapOvr>
+  <p:timing>
+    <p:tnLst>
+      <p:par>
+        <p:cTn id="1" dur="indefinite" restart="never" nodeType="tmRoot">
+          <p:childTnLst>
+            <p:seq concurrent="1" nextAc="seek">
+              <p:cTn id="2" dur="indefinite" nodeType="mainSeq">
+                <p:childTnLst>
+                  <p:par>
+                    <p:cTn id="3" fill="hold">
+                      <p:stCondLst>
+                        <p:cond delay="indefinite"/>
+                      </p:stCondLst>
+                      <p:childTnLst>
+                        <p:par>
+                          <p:cTn id="4" fill="hold">
+                            <p:stCondLst>
+                              <p:cond delay="0"/>
+                            </p:stCondLst>
+                            <p:childTnLst>
+                              <p:par>
+                                <p:cTn id="5" presetID="1" presetClass="mediacall" presetSubtype="0" fill="hold" nodeType="clickEffect">
+                                  <p:stCondLst>
+                                    <p:cond delay="0"/>
+                                  </p:stCondLst>
+                                  <p:childTnLst>
+                                    <p:cmd type="call" cmd="playFrom(0.0)">
+                                      <p:cBhvr>
+                                        <p:cTn id="6" dur="1" fill="hold"/>
+                                        <p:tgtEl>
+                                          <p:spTgt spid="8"/>
+                                        </p:tgtEl>
+                                      </p:cBhvr>
+                                    </p:cmd>
+                                  </p:childTnLst>
+                                </p:cTn>
+                              </p:par>
+                            </p:childTnLst>
+                          </p:cTn>
+                        </p:par>
+                      </p:childTnLst>
+                    </p:cTn>
+                  </p:par>
+                </p:childTnLst>
+              </p:cTn>
+              <p:prevCondLst>
+                <p:cond evt="onPrev" delay="0">
+                  <p:tgtEl>
+                    <p:sldTgt/>
+                  </p:tgtEl>
+                </p:cond>
+              </p:prevCondLst>
+              <p:nextCondLst>
+                <p:cond evt="onNext" delay="0">
+                  <p:tgtEl>
+                    <p:sldTgt/>
+                  </p:tgtEl>
+                </p:cond>
+              </p:nextCondLst>
+            </p:seq>
+            <p:video>
+              <p:cMediaNode vol="80000">
+                <p:cTn id="7" fill="hold" display="0">
+                  <p:stCondLst>
+                    <p:cond delay="indefinite"/>
+                  </p:stCondLst>
+                </p:cTn>
+                <p:tgtEl>
+                  <p:spTgt spid="8"/>
+                </p:tgtEl>
+              </p:cMediaNode>
+            </p:video>
+            <p:seq concurrent="1" nextAc="seek">
+              <p:cTn id="8" restart="whenNotActive" fill="hold" evtFilter="cancelBubble" nodeType="interactiveSeq">
+                <p:stCondLst>
+                  <p:cond evt="onClick" delay="0">
+                    <p:tgtEl>
+                      <p:spTgt spid="8"/>
+                    </p:tgtEl>
+                  </p:cond>
+                </p:stCondLst>
+                <p:endSync evt="end" delay="0">
+                  <p:rtn val="all"/>
+                </p:endSync>
+                <p:childTnLst>
+                  <p:par>
+                    <p:cTn id="9" fill="hold">
+                      <p:stCondLst>
+                        <p:cond delay="0"/>
+                      </p:stCondLst>
+                      <p:childTnLst>
+                        <p:par>
+                          <p:cTn id="10" fill="hold">
+                            <p:stCondLst>
+                              <p:cond delay="0"/>
+                            </p:stCondLst>
+                            <p:childTnLst>
+                              <p:par>
+                                <p:cTn id="11" presetID="2" presetClass="mediacall" presetSubtype="0" fill="hold" nodeType="clickEffect">
+                                  <p:stCondLst>
+                                    <p:cond delay="0"/>
+                                  </p:stCondLst>
+                                  <p:childTnLst>
+                                    <p:cmd type="call" cmd="togglePause">
+                                      <p:cBhvr>
+                                        <p:cTn id="12" dur="1" fill="hold"/>
+                                        <p:tgtEl>
+                                          <p:spTgt spid="8"/>
+                                        </p:tgtEl>
+                                      </p:cBhvr>
+                                    </p:cmd>
+                                  </p:childTnLst>
+                                </p:cTn>
+                              </p:par>
+                            </p:childTnLst>
+                          </p:cTn>
+                        </p:par>
+                      </p:childTnLst>
+                    </p:cTn>
+                  </p:par>
+                </p:childTnLst>
+              </p:cTn>
+              <p:nextCondLst>
+                <p:cond evt="onClick" delay="0">
+                  <p:tgtEl>
+                    <p:spTgt spid="8"/>
+                  </p:tgtEl>
+                </p:cond>
+              </p:nextCondLst>
+            </p:seq>
+          </p:childTnLst>
+        </p:cTn>
+      </p:par>
+    </p:tnLst>
+  </p:timing>
 </p:sld>
 </file>
 
@@ -5753,6 +5814,7 @@
         <a:solidFill>
           <a:srgbClr val="FFFFFF"/>
         </a:solidFill>
+        <a:effectLst/>
       </p:bgPr>
     </p:bg>
     <p:spTree>
@@ -5790,11 +5852,11 @@
           <a:bodyPr wrap="square" lIns="0" tIns="0" rIns="0" bIns="0" rtlCol="0" anchor="ctr"/>
           <a:lstStyle/>
           <a:p>
-            <a:pPr indent="0" marL="0">
-              <a:buNone/>
-            </a:pPr>
-            <a:r>
-              <a:rPr lang="en-US" sz="1200" b="1" spc="200" kern="0" dirty="0">
+            <a:pPr marL="0" indent="0">
+              <a:buNone/>
+            </a:pPr>
+            <a:r>
+              <a:rPr lang="en-US" sz="1200" b="1" kern="0" spc="200" dirty="0">
                 <a:solidFill>
                   <a:srgbClr val="0E7C86"/>
                 </a:solidFill>
@@ -5829,7 +5891,7 @@
           <a:bodyPr wrap="square" lIns="0" tIns="0" rIns="0" bIns="0" rtlCol="0" anchor="ctr"/>
           <a:lstStyle/>
           <a:p>
-            <a:pPr indent="0" marL="0">
+            <a:pPr marL="0" indent="0">
               <a:buNone/>
             </a:pPr>
             <a:r>
@@ -5868,13 +5930,20 @@
           </a:solidFill>
           <a:ln/>
           <a:effectLst>
-            <a:outerShdw sx="100000" sy="100000" kx="0" ky="0" algn="bl" rotWithShape="0" blurRad="88900" dist="38100" dir="5400000">
+            <a:outerShdw blurRad="88900" dist="38100" dir="5400000" algn="bl" rotWithShape="0">
               <a:srgbClr val="000000">
                 <a:alpha val="13000"/>
               </a:srgbClr>
             </a:outerShdw>
           </a:effectLst>
         </p:spPr>
+        <p:txBody>
+          <a:bodyPr/>
+          <a:lstStyle/>
+          <a:p>
+            <a:endParaRPr lang="es-CR"/>
+          </a:p>
+        </p:txBody>
       </p:sp>
       <p:sp>
         <p:nvSpPr>
@@ -5897,7 +5966,7 @@
           <a:bodyPr wrap="square" lIns="0" tIns="0" rIns="0" bIns="0" rtlCol="0" anchor="t"/>
           <a:lstStyle/>
           <a:p>
-            <a:pPr indent="0" marL="0">
+            <a:pPr marL="0" indent="0">
               <a:spcAft>
                 <a:spcPts val="600"/>
               </a:spcAft>
@@ -5917,7 +5986,7 @@
             <a:endParaRPr lang="en-US" sz="1600" dirty="0"/>
           </a:p>
           <a:p>
-            <a:pPr indent="0" marL="0">
+            <a:pPr marL="0" indent="0">
               <a:buNone/>
             </a:pPr>
             <a:r>
@@ -5956,13 +6025,20 @@
           </a:solidFill>
           <a:ln/>
           <a:effectLst>
-            <a:outerShdw sx="100000" sy="100000" kx="0" ky="0" algn="bl" rotWithShape="0" blurRad="88900" dist="38100" dir="5400000">
+            <a:outerShdw blurRad="88900" dist="38100" dir="5400000" algn="bl" rotWithShape="0">
               <a:srgbClr val="000000">
                 <a:alpha val="13000"/>
               </a:srgbClr>
             </a:outerShdw>
           </a:effectLst>
         </p:spPr>
+        <p:txBody>
+          <a:bodyPr/>
+          <a:lstStyle/>
+          <a:p>
+            <a:endParaRPr lang="es-CR"/>
+          </a:p>
+        </p:txBody>
       </p:sp>
       <p:sp>
         <p:nvSpPr>
@@ -5985,7 +6061,7 @@
           <a:bodyPr wrap="square" lIns="0" tIns="0" rIns="0" bIns="0" rtlCol="0" anchor="t"/>
           <a:lstStyle/>
           <a:p>
-            <a:pPr indent="0" marL="0">
+            <a:pPr marL="0" indent="0">
               <a:spcAft>
                 <a:spcPts val="600"/>
               </a:spcAft>
@@ -6005,7 +6081,7 @@
             <a:endParaRPr lang="en-US" sz="1600" dirty="0"/>
           </a:p>
           <a:p>
-            <a:pPr indent="0" marL="0">
+            <a:pPr marL="0" indent="0">
               <a:buNone/>
             </a:pPr>
             <a:r>
@@ -6168,7 +6244,7 @@
           <a:bodyPr wrap="square" lIns="0" tIns="0" rIns="0" bIns="0" rtlCol="0" anchor="ctr"/>
           <a:lstStyle/>
           <a:p>
-            <a:pPr algn="l" indent="0" marL="0">
+            <a:pPr marL="0" indent="0" algn="l">
               <a:buNone/>
             </a:pPr>
             <a:r>
@@ -6207,7 +6283,7 @@
           <a:bodyPr wrap="square" lIns="0" tIns="0" rIns="0" bIns="0" rtlCol="0" anchor="ctr"/>
           <a:lstStyle/>
           <a:p>
-            <a:pPr algn="r" indent="0" marL="0">
+            <a:pPr marL="0" indent="0" algn="r">
               <a:buNone/>
             </a:pPr>
             <a:r>
@@ -6241,6 +6317,7 @@
         <a:solidFill>
           <a:srgbClr val="FFFFFF"/>
         </a:solidFill>
+        <a:effectLst/>
       </p:bgPr>
     </p:bg>
     <p:spTree>
@@ -6278,11 +6355,11 @@
           <a:bodyPr wrap="square" lIns="0" tIns="0" rIns="0" bIns="0" rtlCol="0" anchor="ctr"/>
           <a:lstStyle/>
           <a:p>
-            <a:pPr indent="0" marL="0">
-              <a:buNone/>
-            </a:pPr>
-            <a:r>
-              <a:rPr lang="en-US" sz="1200" b="1" spc="200" kern="0" dirty="0">
+            <a:pPr marL="0" indent="0">
+              <a:buNone/>
+            </a:pPr>
+            <a:r>
+              <a:rPr lang="en-US" sz="1200" b="1" kern="0" spc="200" dirty="0">
                 <a:solidFill>
                   <a:srgbClr val="0E7C86"/>
                 </a:solidFill>
@@ -6317,7 +6394,7 @@
           <a:bodyPr wrap="square" lIns="0" tIns="0" rIns="0" bIns="0" rtlCol="0" anchor="ctr"/>
           <a:lstStyle/>
           <a:p>
-            <a:pPr indent="0" marL="0">
+            <a:pPr marL="0" indent="0">
               <a:buNone/>
             </a:pPr>
             <a:r>
@@ -6356,13 +6433,20 @@
           </a:solidFill>
           <a:ln/>
           <a:effectLst>
-            <a:outerShdw sx="100000" sy="100000" kx="0" ky="0" algn="bl" rotWithShape="0" blurRad="88900" dist="38100" dir="5400000">
+            <a:outerShdw blurRad="88900" dist="38100" dir="5400000" algn="bl" rotWithShape="0">
               <a:srgbClr val="000000">
                 <a:alpha val="13000"/>
               </a:srgbClr>
             </a:outerShdw>
           </a:effectLst>
         </p:spPr>
+        <p:txBody>
+          <a:bodyPr/>
+          <a:lstStyle/>
+          <a:p>
+            <a:endParaRPr lang="es-CR"/>
+          </a:p>
+        </p:txBody>
       </p:sp>
       <p:sp>
         <p:nvSpPr>
@@ -6385,7 +6469,7 @@
           <a:bodyPr wrap="square" lIns="0" tIns="0" rIns="0" bIns="0" rtlCol="0" anchor="t"/>
           <a:lstStyle/>
           <a:p>
-            <a:pPr indent="0" marL="0">
+            <a:pPr marL="0" indent="0">
               <a:buNone/>
             </a:pPr>
             <a:r>
@@ -6424,7 +6508,7 @@
           <a:bodyPr wrap="square" lIns="0" tIns="0" rIns="0" bIns="0" rtlCol="0" anchor="ctr"/>
           <a:lstStyle/>
           <a:p>
-            <a:pPr indent="0" marL="0">
+            <a:pPr marL="0" indent="0">
               <a:buNone/>
             </a:pPr>
             <a:r>
@@ -6463,7 +6547,7 @@
           <a:bodyPr wrap="square" lIns="0" tIns="0" rIns="0" bIns="0" rtlCol="0" anchor="ctr"/>
           <a:lstStyle/>
           <a:p>
-            <a:pPr indent="0" marL="0">
+            <a:pPr marL="0" indent="0">
               <a:buNone/>
             </a:pPr>
             <a:r>
@@ -6502,7 +6586,7 @@
           <a:bodyPr wrap="square" lIns="0" tIns="0" rIns="0" bIns="0" rtlCol="0" anchor="ctr"/>
           <a:lstStyle/>
           <a:p>
-            <a:pPr indent="0" marL="0">
+            <a:pPr marL="0" indent="0">
               <a:buNone/>
             </a:pPr>
             <a:r>
@@ -6541,13 +6625,20 @@
           </a:solidFill>
           <a:ln/>
           <a:effectLst>
-            <a:outerShdw sx="100000" sy="100000" kx="0" ky="0" algn="bl" rotWithShape="0" blurRad="88900" dist="38100" dir="5400000">
+            <a:outerShdw blurRad="88900" dist="38100" dir="5400000" algn="bl" rotWithShape="0">
               <a:srgbClr val="000000">
                 <a:alpha val="13000"/>
               </a:srgbClr>
             </a:outerShdw>
           </a:effectLst>
         </p:spPr>
+        <p:txBody>
+          <a:bodyPr/>
+          <a:lstStyle/>
+          <a:p>
+            <a:endParaRPr lang="es-CR"/>
+          </a:p>
+        </p:txBody>
       </p:sp>
       <p:sp>
         <p:nvSpPr>
@@ -6570,7 +6661,7 @@
           <a:bodyPr wrap="square" lIns="0" tIns="0" rIns="0" bIns="0" rtlCol="0" anchor="t"/>
           <a:lstStyle/>
           <a:p>
-            <a:pPr indent="0" marL="0">
+            <a:pPr marL="0" indent="0">
               <a:buNone/>
             </a:pPr>
             <a:r>
@@ -6609,7 +6700,7 @@
           <a:bodyPr wrap="square" lIns="0" tIns="0" rIns="0" bIns="0" rtlCol="0" anchor="ctr"/>
           <a:lstStyle/>
           <a:p>
-            <a:pPr indent="0" marL="0">
+            <a:pPr marL="0" indent="0">
               <a:buNone/>
             </a:pPr>
             <a:r>
@@ -6648,7 +6739,7 @@
           <a:bodyPr wrap="square" lIns="0" tIns="0" rIns="0" bIns="0" rtlCol="0" anchor="ctr"/>
           <a:lstStyle/>
           <a:p>
-            <a:pPr indent="0" marL="0">
+            <a:pPr marL="0" indent="0">
               <a:buNone/>
             </a:pPr>
             <a:r>
@@ -6687,7 +6778,7 @@
           <a:bodyPr wrap="square" lIns="0" tIns="0" rIns="0" bIns="0" rtlCol="0" anchor="ctr"/>
           <a:lstStyle/>
           <a:p>
-            <a:pPr indent="0" marL="0">
+            <a:pPr marL="0" indent="0">
               <a:buNone/>
             </a:pPr>
             <a:r>
@@ -6726,13 +6817,20 @@
           </a:solidFill>
           <a:ln/>
           <a:effectLst>
-            <a:outerShdw sx="100000" sy="100000" kx="0" ky="0" algn="bl" rotWithShape="0" blurRad="88900" dist="38100" dir="5400000">
+            <a:outerShdw blurRad="88900" dist="38100" dir="5400000" algn="bl" rotWithShape="0">
               <a:srgbClr val="000000">
                 <a:alpha val="13000"/>
               </a:srgbClr>
             </a:outerShdw>
           </a:effectLst>
         </p:spPr>
+        <p:txBody>
+          <a:bodyPr/>
+          <a:lstStyle/>
+          <a:p>
+            <a:endParaRPr lang="es-CR"/>
+          </a:p>
+        </p:txBody>
       </p:sp>
       <p:sp>
         <p:nvSpPr>
@@ -6755,7 +6853,7 @@
           <a:bodyPr wrap="square" lIns="0" tIns="0" rIns="0" bIns="0" rtlCol="0" anchor="t"/>
           <a:lstStyle/>
           <a:p>
-            <a:pPr indent="0" marL="0">
+            <a:pPr marL="0" indent="0">
               <a:buNone/>
             </a:pPr>
             <a:r>
@@ -6794,7 +6892,7 @@
           <a:bodyPr wrap="square" lIns="0" tIns="0" rIns="0" bIns="0" rtlCol="0" anchor="ctr"/>
           <a:lstStyle/>
           <a:p>
-            <a:pPr indent="0" marL="0">
+            <a:pPr marL="0" indent="0">
               <a:buNone/>
             </a:pPr>
             <a:r>
@@ -6833,7 +6931,7 @@
           <a:bodyPr wrap="square" lIns="0" tIns="0" rIns="0" bIns="0" rtlCol="0" anchor="ctr"/>
           <a:lstStyle/>
           <a:p>
-            <a:pPr indent="0" marL="0">
+            <a:pPr marL="0" indent="0">
               <a:buNone/>
             </a:pPr>
             <a:r>
@@ -6872,7 +6970,7 @@
           <a:bodyPr wrap="square" lIns="0" tIns="0" rIns="0" bIns="0" rtlCol="0" anchor="ctr"/>
           <a:lstStyle/>
           <a:p>
-            <a:pPr indent="0" marL="0">
+            <a:pPr marL="0" indent="0">
               <a:buNone/>
             </a:pPr>
             <a:r>
@@ -6911,7 +7009,7 @@
           <a:bodyPr wrap="square" lIns="0" tIns="0" rIns="0" bIns="0" rtlCol="0" anchor="ctr"/>
           <a:lstStyle/>
           <a:p>
-            <a:pPr algn="l" indent="0" marL="0">
+            <a:pPr marL="0" indent="0" algn="l">
               <a:buNone/>
             </a:pPr>
             <a:r>
@@ -6950,7 +7048,7 @@
           <a:bodyPr wrap="square" lIns="0" tIns="0" rIns="0" bIns="0" rtlCol="0" anchor="ctr"/>
           <a:lstStyle/>
           <a:p>
-            <a:pPr algn="r" indent="0" marL="0">
+            <a:pPr marL="0" indent="0" algn="r">
               <a:buNone/>
             </a:pPr>
             <a:r>
@@ -6984,6 +7082,7 @@
         <a:solidFill>
           <a:srgbClr val="FFFFFF"/>
         </a:solidFill>
+        <a:effectLst/>
       </p:bgPr>
     </p:bg>
     <p:spTree>
@@ -7021,11 +7120,11 @@
           <a:bodyPr wrap="square" lIns="0" tIns="0" rIns="0" bIns="0" rtlCol="0" anchor="ctr"/>
           <a:lstStyle/>
           <a:p>
-            <a:pPr indent="0" marL="0">
-              <a:buNone/>
-            </a:pPr>
-            <a:r>
-              <a:rPr lang="en-US" sz="1200" b="1" spc="200" kern="0" dirty="0">
+            <a:pPr marL="0" indent="0">
+              <a:buNone/>
+            </a:pPr>
+            <a:r>
+              <a:rPr lang="en-US" sz="1200" b="1" kern="0" spc="200" dirty="0">
                 <a:solidFill>
                   <a:srgbClr val="0E7C86"/>
                 </a:solidFill>
@@ -7060,7 +7159,7 @@
           <a:bodyPr wrap="square" lIns="0" tIns="0" rIns="0" bIns="0" rtlCol="0" anchor="ctr"/>
           <a:lstStyle/>
           <a:p>
-            <a:pPr indent="0" marL="0">
+            <a:pPr marL="0" indent="0">
               <a:buNone/>
             </a:pPr>
             <a:r>
@@ -7080,7 +7179,7 @@
       </p:sp>
       <p:graphicFrame>
         <p:nvGraphicFramePr>
-          <p:cNvPr id="4" name="Chart 0" descr=""/>
+          <p:cNvPr id="4" name="Chart 0"/>
           <p:cNvGraphicFramePr/>
           <p:nvPr/>
         </p:nvGraphicFramePr>
@@ -7088,9 +7187,9 @@
           <a:off x="502920" y="1783080"/>
           <a:ext cx="7040880" cy="4297680"/>
         </p:xfrm>
-        <a:graphic xmlns:a="http://schemas.openxmlformats.org/drawingml/2006/main">
+        <a:graphic>
           <a:graphicData uri="http://schemas.openxmlformats.org/drawingml/2006/chart">
-            <c:chart xmlns:c="http://schemas.openxmlformats.org/drawingml/2006/chart" r:id="rId1"/>
+            <c:chart xmlns:c="http://schemas.openxmlformats.org/drawingml/2006/chart" xmlns:r="http://schemas.openxmlformats.org/officeDocument/2006/relationships" r:id="rId3"/>
           </a:graphicData>
         </a:graphic>
       </p:graphicFrame>
@@ -7115,13 +7214,20 @@
           </a:solidFill>
           <a:ln/>
           <a:effectLst>
-            <a:outerShdw sx="100000" sy="100000" kx="0" ky="0" algn="bl" rotWithShape="0" blurRad="88900" dist="38100" dir="5400000">
+            <a:outerShdw blurRad="88900" dist="38100" dir="5400000" algn="bl" rotWithShape="0">
               <a:srgbClr val="000000">
                 <a:alpha val="13000"/>
               </a:srgbClr>
             </a:outerShdw>
           </a:effectLst>
         </p:spPr>
+        <p:txBody>
+          <a:bodyPr/>
+          <a:lstStyle/>
+          <a:p>
+            <a:endParaRPr lang="es-CR"/>
+          </a:p>
+        </p:txBody>
       </p:sp>
       <p:sp>
         <p:nvSpPr>
@@ -7144,11 +7250,11 @@
           <a:bodyPr wrap="square" lIns="0" tIns="0" rIns="0" bIns="0" rtlCol="0" anchor="ctr"/>
           <a:lstStyle/>
           <a:p>
-            <a:pPr indent="0" marL="0">
-              <a:buNone/>
-            </a:pPr>
-            <a:r>
-              <a:rPr lang="en-US" sz="1300" b="1" spc="200" kern="0" dirty="0">
+            <a:pPr marL="0" indent="0">
+              <a:buNone/>
+            </a:pPr>
+            <a:r>
+              <a:rPr lang="en-US" sz="1300" b="1" kern="0" spc="200" dirty="0">
                 <a:solidFill>
                   <a:srgbClr val="1FB6A6"/>
                 </a:solidFill>
@@ -7183,7 +7289,7 @@
           <a:bodyPr wrap="square" lIns="0" tIns="0" rIns="0" bIns="0" rtlCol="0" anchor="t"/>
           <a:lstStyle/>
           <a:p>
-            <a:pPr indent="0" marL="0">
+            <a:pPr marL="0" indent="0">
               <a:spcAft>
                 <a:spcPts val="1000"/>
               </a:spcAft>
@@ -7203,7 +7309,7 @@
             <a:endParaRPr lang="en-US" sz="1450" dirty="0"/>
           </a:p>
           <a:p>
-            <a:pPr indent="0" marL="0">
+            <a:pPr marL="0" indent="0">
               <a:spcAft>
                 <a:spcPts val="1000"/>
               </a:spcAft>
@@ -7223,7 +7329,7 @@
             <a:endParaRPr lang="en-US" sz="1450" dirty="0"/>
           </a:p>
           <a:p>
-            <a:pPr indent="0" marL="0">
+            <a:pPr marL="0" indent="0">
               <a:buNone/>
             </a:pPr>
             <a:r>
@@ -7262,7 +7368,7 @@
           <a:bodyPr wrap="square" lIns="0" tIns="0" rIns="0" bIns="0" rtlCol="0" anchor="ctr"/>
           <a:lstStyle/>
           <a:p>
-            <a:pPr algn="l" indent="0" marL="0">
+            <a:pPr marL="0" indent="0" algn="l">
               <a:buNone/>
             </a:pPr>
             <a:r>
@@ -7301,7 +7407,7 @@
           <a:bodyPr wrap="square" lIns="0" tIns="0" rIns="0" bIns="0" rtlCol="0" anchor="ctr"/>
           <a:lstStyle/>
           <a:p>
-            <a:pPr algn="r" indent="0" marL="0">
+            <a:pPr marL="0" indent="0" algn="r">
               <a:buNone/>
             </a:pPr>
             <a:r>
@@ -7335,6 +7441,7 @@
         <a:solidFill>
           <a:srgbClr val="FFFFFF"/>
         </a:solidFill>
+        <a:effectLst/>
       </p:bgPr>
     </p:bg>
     <p:spTree>
@@ -7372,11 +7479,11 @@
           <a:bodyPr wrap="square" lIns="0" tIns="0" rIns="0" bIns="0" rtlCol="0" anchor="ctr"/>
           <a:lstStyle/>
           <a:p>
-            <a:pPr indent="0" marL="0">
-              <a:buNone/>
-            </a:pPr>
-            <a:r>
-              <a:rPr lang="en-US" sz="1200" b="1" spc="200" kern="0" dirty="0">
+            <a:pPr marL="0" indent="0">
+              <a:buNone/>
+            </a:pPr>
+            <a:r>
+              <a:rPr lang="en-US" sz="1200" b="1" kern="0" spc="200" dirty="0">
                 <a:solidFill>
                   <a:srgbClr val="0E7C86"/>
                 </a:solidFill>
@@ -7411,7 +7518,7 @@
           <a:bodyPr wrap="square" lIns="0" tIns="0" rIns="0" bIns="0" rtlCol="0" anchor="ctr"/>
           <a:lstStyle/>
           <a:p>
-            <a:pPr indent="0" marL="0">
+            <a:pPr marL="0" indent="0">
               <a:buNone/>
             </a:pPr>
             <a:r>
@@ -7450,13 +7557,20 @@
           </a:solidFill>
           <a:ln/>
           <a:effectLst>
-            <a:outerShdw sx="100000" sy="100000" kx="0" ky="0" algn="bl" rotWithShape="0" blurRad="88900" dist="38100" dir="5400000">
+            <a:outerShdw blurRad="88900" dist="38100" dir="5400000" algn="bl" rotWithShape="0">
               <a:srgbClr val="000000">
                 <a:alpha val="13000"/>
               </a:srgbClr>
             </a:outerShdw>
           </a:effectLst>
         </p:spPr>
+        <p:txBody>
+          <a:bodyPr/>
+          <a:lstStyle/>
+          <a:p>
+            <a:endParaRPr lang="es-CR"/>
+          </a:p>
+        </p:txBody>
       </p:sp>
       <p:sp>
         <p:nvSpPr>
@@ -7477,13 +7591,20 @@
           </a:solidFill>
           <a:ln/>
           <a:effectLst>
-            <a:outerShdw sx="100000" sy="100000" kx="0" ky="0" algn="bl" rotWithShape="0" blurRad="88900" dist="38100" dir="5400000">
+            <a:outerShdw blurRad="88900" dist="38100" dir="5400000" algn="bl" rotWithShape="0">
               <a:srgbClr val="000000">
                 <a:alpha val="13000"/>
               </a:srgbClr>
             </a:outerShdw>
           </a:effectLst>
         </p:spPr>
+        <p:txBody>
+          <a:bodyPr/>
+          <a:lstStyle/>
+          <a:p>
+            <a:endParaRPr lang="es-CR"/>
+          </a:p>
+        </p:txBody>
       </p:sp>
       <p:sp>
         <p:nvSpPr>
@@ -7506,7 +7627,7 @@
           <a:bodyPr wrap="square" lIns="0" tIns="0" rIns="0" bIns="0" rtlCol="0" anchor="ctr"/>
           <a:lstStyle/>
           <a:p>
-            <a:pPr algn="ctr" indent="0" marL="0">
+            <a:pPr marL="0" indent="0" algn="ctr">
               <a:buNone/>
             </a:pPr>
             <a:r>
@@ -7545,7 +7666,7 @@
           <a:bodyPr wrap="square" lIns="0" tIns="0" rIns="0" bIns="0" rtlCol="0" anchor="ctr"/>
           <a:lstStyle/>
           <a:p>
-            <a:pPr algn="ctr" indent="0" marL="0">
+            <a:pPr marL="0" indent="0" algn="ctr">
               <a:buNone/>
             </a:pPr>
             <a:r>
@@ -7584,7 +7705,7 @@
           <a:bodyPr wrap="square" lIns="0" tIns="0" rIns="0" bIns="0" rtlCol="0" anchor="ctr"/>
           <a:lstStyle/>
           <a:p>
-            <a:pPr indent="0" marL="0">
+            <a:pPr marL="0" indent="0">
               <a:buNone/>
             </a:pPr>
             <a:r>
@@ -7623,7 +7744,7 @@
           <a:bodyPr wrap="square" lIns="0" tIns="0" rIns="0" bIns="0" rtlCol="0" anchor="ctr"/>
           <a:lstStyle/>
           <a:p>
-            <a:pPr indent="0" marL="0">
+            <a:pPr marL="0" indent="0">
               <a:buNone/>
             </a:pPr>
             <a:r>
@@ -7662,13 +7783,20 @@
           </a:solidFill>
           <a:ln/>
           <a:effectLst>
-            <a:outerShdw sx="100000" sy="100000" kx="0" ky="0" algn="bl" rotWithShape="0" blurRad="88900" dist="38100" dir="5400000">
+            <a:outerShdw blurRad="88900" dist="38100" dir="5400000" algn="bl" rotWithShape="0">
               <a:srgbClr val="000000">
                 <a:alpha val="13000"/>
               </a:srgbClr>
             </a:outerShdw>
           </a:effectLst>
         </p:spPr>
+        <p:txBody>
+          <a:bodyPr/>
+          <a:lstStyle/>
+          <a:p>
+            <a:endParaRPr lang="es-CR"/>
+          </a:p>
+        </p:txBody>
       </p:sp>
       <p:sp>
         <p:nvSpPr>
@@ -7689,13 +7817,20 @@
           </a:solidFill>
           <a:ln/>
           <a:effectLst>
-            <a:outerShdw sx="100000" sy="100000" kx="0" ky="0" algn="bl" rotWithShape="0" blurRad="88900" dist="38100" dir="5400000">
+            <a:outerShdw blurRad="88900" dist="38100" dir="5400000" algn="bl" rotWithShape="0">
               <a:srgbClr val="000000">
                 <a:alpha val="13000"/>
               </a:srgbClr>
             </a:outerShdw>
           </a:effectLst>
         </p:spPr>
+        <p:txBody>
+          <a:bodyPr/>
+          <a:lstStyle/>
+          <a:p>
+            <a:endParaRPr lang="es-CR"/>
+          </a:p>
+        </p:txBody>
       </p:sp>
       <p:sp>
         <p:nvSpPr>
@@ -7718,7 +7853,7 @@
           <a:bodyPr wrap="square" lIns="0" tIns="0" rIns="0" bIns="0" rtlCol="0" anchor="ctr"/>
           <a:lstStyle/>
           <a:p>
-            <a:pPr algn="ctr" indent="0" marL="0">
+            <a:pPr marL="0" indent="0" algn="ctr">
               <a:buNone/>
             </a:pPr>
             <a:r>
@@ -7757,7 +7892,7 @@
           <a:bodyPr wrap="square" lIns="0" tIns="0" rIns="0" bIns="0" rtlCol="0" anchor="ctr"/>
           <a:lstStyle/>
           <a:p>
-            <a:pPr algn="ctr" indent="0" marL="0">
+            <a:pPr marL="0" indent="0" algn="ctr">
               <a:buNone/>
             </a:pPr>
             <a:r>
@@ -7796,7 +7931,7 @@
           <a:bodyPr wrap="square" lIns="0" tIns="0" rIns="0" bIns="0" rtlCol="0" anchor="ctr"/>
           <a:lstStyle/>
           <a:p>
-            <a:pPr indent="0" marL="0">
+            <a:pPr marL="0" indent="0">
               <a:buNone/>
             </a:pPr>
             <a:r>
@@ -7835,7 +7970,7 @@
           <a:bodyPr wrap="square" lIns="0" tIns="0" rIns="0" bIns="0" rtlCol="0" anchor="ctr"/>
           <a:lstStyle/>
           <a:p>
-            <a:pPr indent="0" marL="0">
+            <a:pPr marL="0" indent="0">
               <a:buNone/>
             </a:pPr>
             <a:r>
@@ -7874,13 +8009,20 @@
           </a:solidFill>
           <a:ln/>
           <a:effectLst>
-            <a:outerShdw sx="100000" sy="100000" kx="0" ky="0" algn="bl" rotWithShape="0" blurRad="88900" dist="38100" dir="5400000">
+            <a:outerShdw blurRad="88900" dist="38100" dir="5400000" algn="bl" rotWithShape="0">
               <a:srgbClr val="000000">
                 <a:alpha val="13000"/>
               </a:srgbClr>
             </a:outerShdw>
           </a:effectLst>
         </p:spPr>
+        <p:txBody>
+          <a:bodyPr/>
+          <a:lstStyle/>
+          <a:p>
+            <a:endParaRPr lang="es-CR"/>
+          </a:p>
+        </p:txBody>
       </p:sp>
       <p:sp>
         <p:nvSpPr>
@@ -7901,13 +8043,20 @@
           </a:solidFill>
           <a:ln/>
           <a:effectLst>
-            <a:outerShdw sx="100000" sy="100000" kx="0" ky="0" algn="bl" rotWithShape="0" blurRad="88900" dist="38100" dir="5400000">
+            <a:outerShdw blurRad="88900" dist="38100" dir="5400000" algn="bl" rotWithShape="0">
               <a:srgbClr val="000000">
                 <a:alpha val="13000"/>
               </a:srgbClr>
             </a:outerShdw>
           </a:effectLst>
         </p:spPr>
+        <p:txBody>
+          <a:bodyPr/>
+          <a:lstStyle/>
+          <a:p>
+            <a:endParaRPr lang="es-CR"/>
+          </a:p>
+        </p:txBody>
       </p:sp>
       <p:sp>
         <p:nvSpPr>
@@ -7930,7 +8079,7 @@
           <a:bodyPr wrap="square" lIns="0" tIns="0" rIns="0" bIns="0" rtlCol="0" anchor="ctr"/>
           <a:lstStyle/>
           <a:p>
-            <a:pPr algn="ctr" indent="0" marL="0">
+            <a:pPr marL="0" indent="0" algn="ctr">
               <a:buNone/>
             </a:pPr>
             <a:r>
@@ -7969,7 +8118,7 @@
           <a:bodyPr wrap="square" lIns="0" tIns="0" rIns="0" bIns="0" rtlCol="0" anchor="ctr"/>
           <a:lstStyle/>
           <a:p>
-            <a:pPr algn="ctr" indent="0" marL="0">
+            <a:pPr marL="0" indent="0" algn="ctr">
               <a:buNone/>
             </a:pPr>
             <a:r>
@@ -8008,7 +8157,7 @@
           <a:bodyPr wrap="square" lIns="0" tIns="0" rIns="0" bIns="0" rtlCol="0" anchor="ctr"/>
           <a:lstStyle/>
           <a:p>
-            <a:pPr indent="0" marL="0">
+            <a:pPr marL="0" indent="0">
               <a:buNone/>
             </a:pPr>
             <a:r>
@@ -8047,7 +8196,7 @@
           <a:bodyPr wrap="square" lIns="0" tIns="0" rIns="0" bIns="0" rtlCol="0" anchor="ctr"/>
           <a:lstStyle/>
           <a:p>
-            <a:pPr indent="0" marL="0">
+            <a:pPr marL="0" indent="0">
               <a:buNone/>
             </a:pPr>
             <a:r>
@@ -8086,7 +8235,7 @@
           <a:bodyPr wrap="square" lIns="0" tIns="0" rIns="0" bIns="0" rtlCol="0" anchor="ctr"/>
           <a:lstStyle/>
           <a:p>
-            <a:pPr algn="l" indent="0" marL="0">
+            <a:pPr marL="0" indent="0" algn="l">
               <a:buNone/>
             </a:pPr>
             <a:r>
@@ -8125,7 +8274,7 @@
           <a:bodyPr wrap="square" lIns="0" tIns="0" rIns="0" bIns="0" rtlCol="0" anchor="ctr"/>
           <a:lstStyle/>
           <a:p>
-            <a:pPr algn="r" indent="0" marL="0">
+            <a:pPr marL="0" indent="0" algn="r">
               <a:buNone/>
             </a:pPr>
             <a:r>
@@ -8444,4 +8593,319 @@
     </a:ext>
   </a:extLst>
 </a:theme>
+</file>
+
+<file path=ppt/theme/theme2.xml><?xml version="1.0" encoding="utf-8"?>
+<a:theme xmlns:a="http://schemas.openxmlformats.org/drawingml/2006/main" name="Tema de Office">
+  <a:themeElements>
+    <a:clrScheme name="Office">
+      <a:dk1>
+        <a:sysClr val="windowText" lastClr="000000"/>
+      </a:dk1>
+      <a:lt1>
+        <a:sysClr val="window" lastClr="FFFFFF"/>
+      </a:lt1>
+      <a:dk2>
+        <a:srgbClr val="0E2841"/>
+      </a:dk2>
+      <a:lt2>
+        <a:srgbClr val="E8E8E8"/>
+      </a:lt2>
+      <a:accent1>
+        <a:srgbClr val="156082"/>
+      </a:accent1>
+      <a:accent2>
+        <a:srgbClr val="E97132"/>
+      </a:accent2>
+      <a:accent3>
+        <a:srgbClr val="196B24"/>
+      </a:accent3>
+      <a:accent4>
+        <a:srgbClr val="0F9ED5"/>
+      </a:accent4>
+      <a:accent5>
+        <a:srgbClr val="A02B93"/>
+      </a:accent5>
+      <a:accent6>
+        <a:srgbClr val="4EA72E"/>
+      </a:accent6>
+      <a:hlink>
+        <a:srgbClr val="467886"/>
+      </a:hlink>
+      <a:folHlink>
+        <a:srgbClr val="96607D"/>
+      </a:folHlink>
+    </a:clrScheme>
+    <a:fontScheme name="Office">
+      <a:majorFont>
+        <a:latin typeface="Aptos Display" panose="02110004020202020204"/>
+        <a:ea typeface=""/>
+        <a:cs typeface=""/>
+        <a:font script="Jpan" typeface="游ゴシック Light"/>
+        <a:font script="Hang" typeface="맑은 고딕"/>
+        <a:font script="Hans" typeface="等线 Light"/>
+        <a:font script="Hant" typeface="新細明體"/>
+        <a:font script="Arab" typeface="Times New Roman"/>
+        <a:font script="Hebr" typeface="Times New Roman"/>
+        <a:font script="Thai" typeface="Angsana New"/>
+        <a:font script="Ethi" typeface="Nyala"/>
+        <a:font script="Beng" typeface="Vrinda"/>
+        <a:font script="Gujr" typeface="Shruti"/>
+        <a:font script="Khmr" typeface="MoolBoran"/>
+        <a:font script="Knda" typeface="Tunga"/>
+        <a:font script="Guru" typeface="Raavi"/>
+        <a:font script="Cans" typeface="Euphemia"/>
+        <a:font script="Cher" typeface="Plantagenet Cherokee"/>
+        <a:font script="Yiii" typeface="Microsoft Yi Baiti"/>
+        <a:font script="Tibt" typeface="Microsoft Himalaya"/>
+        <a:font script="Thaa" typeface="MV Boli"/>
+        <a:font script="Deva" typeface="Mangal"/>
+        <a:font script="Telu" typeface="Gautami"/>
+        <a:font script="Taml" typeface="Latha"/>
+        <a:font script="Syrc" typeface="Estrangelo Edessa"/>
+        <a:font script="Orya" typeface="Kalinga"/>
+        <a:font script="Mlym" typeface="Kartika"/>
+        <a:font script="Laoo" typeface="DokChampa"/>
+        <a:font script="Sinh" typeface="Iskoola Pota"/>
+        <a:font script="Mong" typeface="Mongolian Baiti"/>
+        <a:font script="Viet" typeface="Times New Roman"/>
+        <a:font script="Uigh" typeface="Microsoft Uighur"/>
+        <a:font script="Geor" typeface="Sylfaen"/>
+        <a:font script="Armn" typeface="Arial"/>
+        <a:font script="Bugi" typeface="Leelawadee UI"/>
+        <a:font script="Bopo" typeface="Microsoft JhengHei"/>
+        <a:font script="Java" typeface="Javanese Text"/>
+        <a:font script="Lisu" typeface="Segoe UI"/>
+        <a:font script="Mymr" typeface="Myanmar Text"/>
+        <a:font script="Nkoo" typeface="Ebrima"/>
+        <a:font script="Olck" typeface="Nirmala UI"/>
+        <a:font script="Osma" typeface="Ebrima"/>
+        <a:font script="Phag" typeface="Phagspa"/>
+        <a:font script="Syrn" typeface="Estrangelo Edessa"/>
+        <a:font script="Syrj" typeface="Estrangelo Edessa"/>
+        <a:font script="Syre" typeface="Estrangelo Edessa"/>
+        <a:font script="Sora" typeface="Nirmala UI"/>
+        <a:font script="Tale" typeface="Microsoft Tai Le"/>
+        <a:font script="Talu" typeface="Microsoft New Tai Lue"/>
+        <a:font script="Tfng" typeface="Ebrima"/>
+      </a:majorFont>
+      <a:minorFont>
+        <a:latin typeface="Aptos" panose="02110004020202020204"/>
+        <a:ea typeface=""/>
+        <a:cs typeface=""/>
+        <a:font script="Jpan" typeface="游ゴシック"/>
+        <a:font script="Hang" typeface="맑은 고딕"/>
+        <a:font script="Hans" typeface="等线"/>
+        <a:font script="Hant" typeface="新細明體"/>
+        <a:font script="Arab" typeface="Arial"/>
+        <a:font script="Hebr" typeface="Arial"/>
+        <a:font script="Thai" typeface="Cordia New"/>
+        <a:font script="Ethi" typeface="Nyala"/>
+        <a:font script="Beng" typeface="Vrinda"/>
+        <a:font script="Gujr" typeface="Shruti"/>
+        <a:font script="Khmr" typeface="DaunPenh"/>
+        <a:font script="Knda" typeface="Tunga"/>
+        <a:font script="Guru" typeface="Raavi"/>
+        <a:font script="Cans" typeface="Euphemia"/>
+        <a:font script="Cher" typeface="Plantagenet Cherokee"/>
+        <a:font script="Yiii" typeface="Microsoft Yi Baiti"/>
+        <a:font script="Tibt" typeface="Microsoft Himalaya"/>
+        <a:font script="Thaa" typeface="MV Boli"/>
+        <a:font script="Deva" typeface="Mangal"/>
+        <a:font script="Telu" typeface="Gautami"/>
+        <a:font script="Taml" typeface="Latha"/>
+        <a:font script="Syrc" typeface="Estrangelo Edessa"/>
+        <a:font script="Orya" typeface="Kalinga"/>
+        <a:font script="Mlym" typeface="Kartika"/>
+        <a:font script="Laoo" typeface="DokChampa"/>
+        <a:font script="Sinh" typeface="Iskoola Pota"/>
+        <a:font script="Mong" typeface="Mongolian Baiti"/>
+        <a:font script="Viet" typeface="Arial"/>
+        <a:font script="Uigh" typeface="Microsoft Uighur"/>
+        <a:font script="Geor" typeface="Sylfaen"/>
+        <a:font script="Armn" typeface="Arial"/>
+        <a:font script="Bugi" typeface="Leelawadee UI"/>
+        <a:font script="Bopo" typeface="Microsoft JhengHei"/>
+        <a:font script="Java" typeface="Javanese Text"/>
+        <a:font script="Lisu" typeface="Segoe UI"/>
+        <a:font script="Mymr" typeface="Myanmar Text"/>
+        <a:font script="Nkoo" typeface="Ebrima"/>
+        <a:font script="Olck" typeface="Nirmala UI"/>
+        <a:font script="Osma" typeface="Ebrima"/>
+        <a:font script="Phag" typeface="Phagspa"/>
+        <a:font script="Syrn" typeface="Estrangelo Edessa"/>
+        <a:font script="Syrj" typeface="Estrangelo Edessa"/>
+        <a:font script="Syre" typeface="Estrangelo Edessa"/>
+        <a:font script="Sora" typeface="Nirmala UI"/>
+        <a:font script="Tale" typeface="Microsoft Tai Le"/>
+        <a:font script="Talu" typeface="Microsoft New Tai Lue"/>
+        <a:font script="Tfng" typeface="Ebrima"/>
+      </a:minorFont>
+    </a:fontScheme>
+    <a:fmtScheme name="Office">
+      <a:fillStyleLst>
+        <a:solidFill>
+          <a:schemeClr val="phClr"/>
+        </a:solidFill>
+        <a:gradFill rotWithShape="1">
+          <a:gsLst>
+            <a:gs pos="0">
+              <a:schemeClr val="phClr">
+                <a:lumMod val="110000"/>
+                <a:satMod val="105000"/>
+                <a:tint val="67000"/>
+              </a:schemeClr>
+            </a:gs>
+            <a:gs pos="50000">
+              <a:schemeClr val="phClr">
+                <a:lumMod val="105000"/>
+                <a:satMod val="103000"/>
+                <a:tint val="73000"/>
+              </a:schemeClr>
+            </a:gs>
+            <a:gs pos="100000">
+              <a:schemeClr val="phClr">
+                <a:lumMod val="105000"/>
+                <a:satMod val="109000"/>
+                <a:tint val="81000"/>
+              </a:schemeClr>
+            </a:gs>
+          </a:gsLst>
+          <a:lin ang="5400000" scaled="0"/>
+        </a:gradFill>
+        <a:gradFill rotWithShape="1">
+          <a:gsLst>
+            <a:gs pos="0">
+              <a:schemeClr val="phClr">
+                <a:satMod val="103000"/>
+                <a:lumMod val="102000"/>
+                <a:tint val="94000"/>
+              </a:schemeClr>
+            </a:gs>
+            <a:gs pos="50000">
+              <a:schemeClr val="phClr">
+                <a:satMod val="110000"/>
+                <a:lumMod val="100000"/>
+                <a:shade val="100000"/>
+              </a:schemeClr>
+            </a:gs>
+            <a:gs pos="100000">
+              <a:schemeClr val="phClr">
+                <a:lumMod val="99000"/>
+                <a:satMod val="120000"/>
+                <a:shade val="78000"/>
+              </a:schemeClr>
+            </a:gs>
+          </a:gsLst>
+          <a:lin ang="5400000" scaled="0"/>
+        </a:gradFill>
+      </a:fillStyleLst>
+      <a:lnStyleLst>
+        <a:ln w="12700" cap="flat" cmpd="sng" algn="ctr">
+          <a:solidFill>
+            <a:schemeClr val="phClr"/>
+          </a:solidFill>
+          <a:prstDash val="solid"/>
+          <a:miter lim="800000"/>
+        </a:ln>
+        <a:ln w="19050" cap="flat" cmpd="sng" algn="ctr">
+          <a:solidFill>
+            <a:schemeClr val="phClr"/>
+          </a:solidFill>
+          <a:prstDash val="solid"/>
+          <a:miter lim="800000"/>
+        </a:ln>
+        <a:ln w="25400" cap="flat" cmpd="sng" algn="ctr">
+          <a:solidFill>
+            <a:schemeClr val="phClr"/>
+          </a:solidFill>
+          <a:prstDash val="solid"/>
+          <a:miter lim="800000"/>
+        </a:ln>
+      </a:lnStyleLst>
+      <a:effectStyleLst>
+        <a:effectStyle>
+          <a:effectLst/>
+        </a:effectStyle>
+        <a:effectStyle>
+          <a:effectLst/>
+        </a:effectStyle>
+        <a:effectStyle>
+          <a:effectLst>
+            <a:outerShdw blurRad="57150" dist="19050" dir="5400000" algn="ctr" rotWithShape="0">
+              <a:srgbClr val="000000">
+                <a:alpha val="63000"/>
+              </a:srgbClr>
+            </a:outerShdw>
+          </a:effectLst>
+        </a:effectStyle>
+      </a:effectStyleLst>
+      <a:bgFillStyleLst>
+        <a:solidFill>
+          <a:schemeClr val="phClr"/>
+        </a:solidFill>
+        <a:solidFill>
+          <a:schemeClr val="phClr">
+            <a:tint val="95000"/>
+            <a:satMod val="170000"/>
+          </a:schemeClr>
+        </a:solidFill>
+        <a:gradFill rotWithShape="1">
+          <a:gsLst>
+            <a:gs pos="0">
+              <a:schemeClr val="phClr">
+                <a:tint val="93000"/>
+                <a:satMod val="150000"/>
+                <a:shade val="98000"/>
+                <a:lumMod val="102000"/>
+              </a:schemeClr>
+            </a:gs>
+            <a:gs pos="50000">
+              <a:schemeClr val="phClr">
+                <a:tint val="98000"/>
+                <a:satMod val="130000"/>
+                <a:shade val="90000"/>
+                <a:lumMod val="103000"/>
+              </a:schemeClr>
+            </a:gs>
+            <a:gs pos="100000">
+              <a:schemeClr val="phClr">
+                <a:shade val="63000"/>
+                <a:satMod val="120000"/>
+              </a:schemeClr>
+            </a:gs>
+          </a:gsLst>
+          <a:lin ang="5400000" scaled="0"/>
+        </a:gradFill>
+      </a:bgFillStyleLst>
+    </a:fmtScheme>
+  </a:themeElements>
+  <a:objectDefaults>
+    <a:lnDef>
+      <a:spPr/>
+      <a:bodyPr/>
+      <a:lstStyle/>
+      <a:style>
+        <a:lnRef idx="2">
+          <a:schemeClr val="accent1"/>
+        </a:lnRef>
+        <a:fillRef idx="0">
+          <a:schemeClr val="accent1"/>
+        </a:fillRef>
+        <a:effectRef idx="1">
+          <a:schemeClr val="accent1"/>
+        </a:effectRef>
+        <a:fontRef idx="minor">
+          <a:schemeClr val="tx1"/>
+        </a:fontRef>
+      </a:style>
+    </a:lnDef>
+  </a:objectDefaults>
+  <a:extraClrSchemeLst/>
+  <a:extLst>
+    <a:ext uri="{05A4C25C-085E-4340-85A3-A5531E510DB2}">
+      <thm15:themeFamily xmlns:thm15="http://schemas.microsoft.com/office/thememl/2012/main" name="Office Theme" id="{2E142A2C-CD16-42D6-873A-C26D2A0506FA}" vid="{1BDDFF52-6CD6-40A5-AB3C-68EB2F1E4D0A}"/>
+    </a:ext>
+  </a:extLst>
+</a:theme>
 </file>